--- a/aulas/aula-09-operacao-incidentes.pptx
+++ b/aulas/aula-09-operacao-incidentes.pptx
@@ -6,14 +6,14 @@
   </p:sldMasterIdLst>
   <p:sldIdLst>
     <p:sldId id="256" r:id="rId7"/>
-    <p:sldId id="257" r:id="rId8"/>
-    <p:sldId id="258" r:id="rId9"/>
-    <p:sldId id="259" r:id="rId10"/>
-    <p:sldId id="260" r:id="rId11"/>
-    <p:sldId id="261" r:id="rId12"/>
-    <p:sldId id="262" r:id="rId13"/>
-    <p:sldId id="263" r:id="rId14"/>
-    <p:sldId id="264" r:id="rId15"/>
+    <p:sldId id="257" r:id="rId9"/>
+    <p:sldId id="258" r:id="rId10"/>
+    <p:sldId id="259" r:id="rId11"/>
+    <p:sldId id="260" r:id="rId12"/>
+    <p:sldId id="261" r:id="rId13"/>
+    <p:sldId id="262" r:id="rId14"/>
+    <p:sldId id="263" r:id="rId15"/>
+    <p:sldId id="264" r:id="rId16"/>
   </p:sldIdLst>
   <p:sldSz cx="12191695" cy="6858000" type="screen4x3"/>
   <p:notesSz cx="6858000" cy="9144000"/>
@@ -113,6 +113,706 @@
     </a:lvl9pPr>
   </p:defaultTextStyle>
 </p:presentation>
+</file>
+
+<file path=ppt/notesMasters/notesMaster1.xml><?xml version="1.0" encoding="utf-8"?>
+<p:notesMaster xmlns:a="http://schemas.openxmlformats.org/drawingml/2006/main" xmlns:p="http://schemas.openxmlformats.org/presentationml/2006/main" xmlns:r="http://schemas.openxmlformats.org/officeDocument/2006/relationships">
+  <p:cSld>
+    <p:bg>
+      <p:bgRef idx="1001">
+        <a:schemeClr val="bg1"/>
+      </p:bgRef>
+    </p:bg>
+    <p:spTree>
+      <p:nvGrpSpPr>
+        <p:cNvPr id="1" name=""/>
+        <p:cNvGrpSpPr/>
+        <p:nvPr/>
+      </p:nvGrpSpPr>
+      <p:grpSpPr>
+        <a:xfrm>
+          <a:off x="0" y="0"/>
+          <a:ext cx="0" cy="0"/>
+          <a:chOff x="0" y="0"/>
+          <a:chExt cx="0" cy="0"/>
+        </a:xfrm>
+      </p:grpSpPr>
+      <p:sp>
+        <p:nvSpPr>
+          <p:cNvPr id="2" name="Header Placeholder 1"/>
+          <p:cNvSpPr>
+            <a:spLocks noGrp="1"/>
+          </p:cNvSpPr>
+          <p:nvPr>
+            <p:ph type="hdr" sz="quarter"/>
+          </p:nvPr>
+        </p:nvSpPr>
+        <p:spPr>
+          <a:xfrm>
+            <a:off x="0" y="0"/>
+            <a:ext cx="2971800" cy="457200"/>
+          </a:xfrm>
+          <a:prstGeom prst="rect">
+            <a:avLst/>
+          </a:prstGeom>
+        </p:spPr>
+        <p:txBody>
+          <a:bodyPr vert="horz" lIns="91440" tIns="45720" rIns="91440" bIns="45720" rtlCol="0"/>
+          <a:lstStyle>
+            <a:lvl1pPr algn="l">
+              <a:defRPr sz="1200"/>
+            </a:lvl1pPr>
+          </a:lstStyle>
+          <a:p>
+            <a:endParaRPr lang="en-US"/>
+          </a:p>
+        </p:txBody>
+      </p:sp>
+      <p:sp>
+        <p:nvSpPr>
+          <p:cNvPr id="3" name="Date Placeholder 2"/>
+          <p:cNvSpPr>
+            <a:spLocks noGrp="1"/>
+          </p:cNvSpPr>
+          <p:nvPr>
+            <p:ph type="dt" idx="1"/>
+          </p:nvPr>
+        </p:nvSpPr>
+        <p:spPr>
+          <a:xfrm>
+            <a:off x="3884613" y="0"/>
+            <a:ext cx="2971800" cy="457200"/>
+          </a:xfrm>
+          <a:prstGeom prst="rect">
+            <a:avLst/>
+          </a:prstGeom>
+        </p:spPr>
+        <p:txBody>
+          <a:bodyPr vert="horz" lIns="91440" tIns="45720" rIns="91440" bIns="45720" rtlCol="0"/>
+          <a:lstStyle>
+            <a:lvl1pPr algn="r">
+              <a:defRPr sz="1200"/>
+            </a:lvl1pPr>
+          </a:lstStyle>
+          <a:p>
+            <a:fld id="{0F89C1C7-3DCD-1040-A9CF-14679D8B5DDD}" type="datetimeFigureOut">
+              <a:rPr lang="en-US" smtClean="0"/>
+              <a:t>10/17/16</a:t>
+            </a:fld>
+            <a:endParaRPr lang="en-US"/>
+          </a:p>
+        </p:txBody>
+      </p:sp>
+      <p:sp>
+        <p:nvSpPr>
+          <p:cNvPr id="4" name="Slide Image Placeholder 3"/>
+          <p:cNvSpPr>
+            <a:spLocks noGrp="1" noRot="1" noChangeAspect="1"/>
+          </p:cNvSpPr>
+          <p:nvPr>
+            <p:ph type="sldImg" idx="2"/>
+          </p:nvPr>
+        </p:nvSpPr>
+        <p:spPr>
+          <a:xfrm>
+            <a:off x="1143000" y="685800"/>
+            <a:ext cx="4572000" cy="3429000"/>
+          </a:xfrm>
+          <a:prstGeom prst="rect">
+            <a:avLst/>
+          </a:prstGeom>
+          <a:noFill/>
+          <a:ln w="12700">
+            <a:solidFill>
+              <a:prstClr val="black"/>
+            </a:solidFill>
+          </a:ln>
+        </p:spPr>
+        <p:txBody>
+          <a:bodyPr vert="horz" lIns="91440" tIns="45720" rIns="91440" bIns="45720" rtlCol="0" anchor="ctr"/>
+          <a:lstStyle/>
+          <a:p>
+            <a:endParaRPr lang="en-US"/>
+          </a:p>
+        </p:txBody>
+      </p:sp>
+      <p:sp>
+        <p:nvSpPr>
+          <p:cNvPr id="5" name="Notes Placeholder 4"/>
+          <p:cNvSpPr>
+            <a:spLocks noGrp="1"/>
+          </p:cNvSpPr>
+          <p:nvPr>
+            <p:ph type="body" sz="quarter" idx="3"/>
+          </p:nvPr>
+        </p:nvSpPr>
+        <p:spPr>
+          <a:xfrm>
+            <a:off x="685800" y="4343400"/>
+            <a:ext cx="5486400" cy="4114800"/>
+          </a:xfrm>
+          <a:prstGeom prst="rect">
+            <a:avLst/>
+          </a:prstGeom>
+        </p:spPr>
+        <p:txBody>
+          <a:bodyPr vert="horz" lIns="91440" tIns="45720" rIns="91440" bIns="45720" rtlCol="0"/>
+          <a:lstStyle/>
+          <a:p>
+            <a:pPr lvl="0"/>
+            <a:r>
+              <a:rPr lang="en-US" smtClean="0"/>
+              <a:t>Click to edit Master text styles</a:t>
+            </a:r>
+          </a:p>
+          <a:p>
+            <a:pPr lvl="1"/>
+            <a:r>
+              <a:rPr lang="en-US" smtClean="0"/>
+              <a:t>Second level</a:t>
+            </a:r>
+          </a:p>
+          <a:p>
+            <a:pPr lvl="2"/>
+            <a:r>
+              <a:rPr lang="en-US" smtClean="0"/>
+              <a:t>Third level</a:t>
+            </a:r>
+          </a:p>
+          <a:p>
+            <a:pPr lvl="3"/>
+            <a:r>
+              <a:rPr lang="en-US" smtClean="0"/>
+              <a:t>Fourth level</a:t>
+            </a:r>
+          </a:p>
+          <a:p>
+            <a:pPr lvl="4"/>
+            <a:r>
+              <a:rPr lang="en-US" smtClean="0"/>
+              <a:t>Fifth level</a:t>
+            </a:r>
+            <a:endParaRPr lang="en-US"/>
+          </a:p>
+        </p:txBody>
+      </p:sp>
+      <p:sp>
+        <p:nvSpPr>
+          <p:cNvPr id="6" name="Footer Placeholder 5"/>
+          <p:cNvSpPr>
+            <a:spLocks noGrp="1"/>
+          </p:cNvSpPr>
+          <p:nvPr>
+            <p:ph type="ftr" sz="quarter" idx="4"/>
+          </p:nvPr>
+        </p:nvSpPr>
+        <p:spPr>
+          <a:xfrm>
+            <a:off x="0" y="8685213"/>
+            <a:ext cx="2971800" cy="457200"/>
+          </a:xfrm>
+          <a:prstGeom prst="rect">
+            <a:avLst/>
+          </a:prstGeom>
+        </p:spPr>
+        <p:txBody>
+          <a:bodyPr vert="horz" lIns="91440" tIns="45720" rIns="91440" bIns="45720" rtlCol="0" anchor="b"/>
+          <a:lstStyle>
+            <a:lvl1pPr algn="l">
+              <a:defRPr sz="1200"/>
+            </a:lvl1pPr>
+          </a:lstStyle>
+          <a:p>
+            <a:endParaRPr lang="en-US"/>
+          </a:p>
+        </p:txBody>
+      </p:sp>
+      <p:sp>
+        <p:nvSpPr>
+          <p:cNvPr id="7" name="Slide Number Placeholder 6"/>
+          <p:cNvSpPr>
+            <a:spLocks noGrp="1"/>
+          </p:cNvSpPr>
+          <p:nvPr>
+            <p:ph type="sldNum" sz="quarter" idx="5"/>
+          </p:nvPr>
+        </p:nvSpPr>
+        <p:spPr>
+          <a:xfrm>
+            <a:off x="3884613" y="8685213"/>
+            <a:ext cx="2971800" cy="457200"/>
+          </a:xfrm>
+          <a:prstGeom prst="rect">
+            <a:avLst/>
+          </a:prstGeom>
+        </p:spPr>
+        <p:txBody>
+          <a:bodyPr vert="horz" lIns="91440" tIns="45720" rIns="91440" bIns="45720" rtlCol="0" anchor="b"/>
+          <a:lstStyle>
+            <a:lvl1pPr algn="r">
+              <a:defRPr sz="1200"/>
+            </a:lvl1pPr>
+          </a:lstStyle>
+          <a:p>
+            <a:fld id="{BB5E49A5-4136-284D-997B-48E1D791AD67}" type="slidenum">
+              <a:rPr lang="en-US" smtClean="0"/>
+              <a:t>‹#›</a:t>
+            </a:fld>
+            <a:endParaRPr lang="en-US"/>
+          </a:p>
+        </p:txBody>
+      </p:sp>
+    </p:spTree>
+    <p:extLst>
+      <p:ext uri="{BB962C8B-B14F-4D97-AF65-F5344CB8AC3E}">
+        <p14:creationId xmlns:p14="http://schemas.microsoft.com/office/powerpoint/2010/main" val="2623252185"/>
+      </p:ext>
+    </p:extLst>
+  </p:cSld>
+  <p:clrMap bg1="lt1" tx1="dk1" bg2="lt2" tx2="dk2" accent1="accent1" accent2="accent2" accent3="accent3" accent4="accent4" accent5="accent5" accent6="accent6" hlink="hlink" folHlink="folHlink"/>
+  <p:notesStyle>
+    <a:lvl1pPr marL="0" algn="l" defTabSz="457200" rtl="0" eaLnBrk="1" latinLnBrk="0" hangingPunct="1">
+      <a:defRPr sz="1200" kern="1200">
+        <a:solidFill>
+          <a:schemeClr val="tx1"/>
+        </a:solidFill>
+        <a:latin typeface="+mn-lt"/>
+        <a:ea typeface="+mn-ea"/>
+        <a:cs typeface="+mn-cs"/>
+      </a:defRPr>
+    </a:lvl1pPr>
+    <a:lvl2pPr marL="457200" algn="l" defTabSz="457200" rtl="0" eaLnBrk="1" latinLnBrk="0" hangingPunct="1">
+      <a:defRPr sz="1200" kern="1200">
+        <a:solidFill>
+          <a:schemeClr val="tx1"/>
+        </a:solidFill>
+        <a:latin typeface="+mn-lt"/>
+        <a:ea typeface="+mn-ea"/>
+        <a:cs typeface="+mn-cs"/>
+      </a:defRPr>
+    </a:lvl2pPr>
+    <a:lvl3pPr marL="914400" algn="l" defTabSz="457200" rtl="0" eaLnBrk="1" latinLnBrk="0" hangingPunct="1">
+      <a:defRPr sz="1200" kern="1200">
+        <a:solidFill>
+          <a:schemeClr val="tx1"/>
+        </a:solidFill>
+        <a:latin typeface="+mn-lt"/>
+        <a:ea typeface="+mn-ea"/>
+        <a:cs typeface="+mn-cs"/>
+      </a:defRPr>
+    </a:lvl3pPr>
+    <a:lvl4pPr marL="1371600" algn="l" defTabSz="457200" rtl="0" eaLnBrk="1" latinLnBrk="0" hangingPunct="1">
+      <a:defRPr sz="1200" kern="1200">
+        <a:solidFill>
+          <a:schemeClr val="tx1"/>
+        </a:solidFill>
+        <a:latin typeface="+mn-lt"/>
+        <a:ea typeface="+mn-ea"/>
+        <a:cs typeface="+mn-cs"/>
+      </a:defRPr>
+    </a:lvl4pPr>
+    <a:lvl5pPr marL="1828800" algn="l" defTabSz="457200" rtl="0" eaLnBrk="1" latinLnBrk="0" hangingPunct="1">
+      <a:defRPr sz="1200" kern="1200">
+        <a:solidFill>
+          <a:schemeClr val="tx1"/>
+        </a:solidFill>
+        <a:latin typeface="+mn-lt"/>
+        <a:ea typeface="+mn-ea"/>
+        <a:cs typeface="+mn-cs"/>
+      </a:defRPr>
+    </a:lvl5pPr>
+    <a:lvl6pPr marL="2286000" algn="l" defTabSz="457200" rtl="0" eaLnBrk="1" latinLnBrk="0" hangingPunct="1">
+      <a:defRPr sz="1200" kern="1200">
+        <a:solidFill>
+          <a:schemeClr val="tx1"/>
+        </a:solidFill>
+        <a:latin typeface="+mn-lt"/>
+        <a:ea typeface="+mn-ea"/>
+        <a:cs typeface="+mn-cs"/>
+      </a:defRPr>
+    </a:lvl6pPr>
+    <a:lvl7pPr marL="2743200" algn="l" defTabSz="457200" rtl="0" eaLnBrk="1" latinLnBrk="0" hangingPunct="1">
+      <a:defRPr sz="1200" kern="1200">
+        <a:solidFill>
+          <a:schemeClr val="tx1"/>
+        </a:solidFill>
+        <a:latin typeface="+mn-lt"/>
+        <a:ea typeface="+mn-ea"/>
+        <a:cs typeface="+mn-cs"/>
+      </a:defRPr>
+    </a:lvl7pPr>
+    <a:lvl8pPr marL="3200400" algn="l" defTabSz="457200" rtl="0" eaLnBrk="1" latinLnBrk="0" hangingPunct="1">
+      <a:defRPr sz="1200" kern="1200">
+        <a:solidFill>
+          <a:schemeClr val="tx1"/>
+        </a:solidFill>
+        <a:latin typeface="+mn-lt"/>
+        <a:ea typeface="+mn-ea"/>
+        <a:cs typeface="+mn-cs"/>
+      </a:defRPr>
+    </a:lvl8pPr>
+    <a:lvl9pPr marL="3657600" algn="l" defTabSz="457200" rtl="0" eaLnBrk="1" latinLnBrk="0" hangingPunct="1">
+      <a:defRPr sz="1200" kern="1200">
+        <a:solidFill>
+          <a:schemeClr val="tx1"/>
+        </a:solidFill>
+        <a:latin typeface="+mn-lt"/>
+        <a:ea typeface="+mn-ea"/>
+        <a:cs typeface="+mn-cs"/>
+      </a:defRPr>
+    </a:lvl9pPr>
+  </p:notesStyle>
+</p:notesMaster>
+</file>
+
+<file path=ppt/notesSlides/notesSlide1.xml><?xml version="1.0" encoding="utf-8"?>
+<p:notes xmlns:a="http://schemas.openxmlformats.org/drawingml/2006/main" xmlns:p="http://schemas.openxmlformats.org/presentationml/2006/main" xmlns:r="http://schemas.openxmlformats.org/officeDocument/2006/relationships">
+  <p:cSld>
+    <p:spTree>
+      <p:nvGrpSpPr>
+        <p:cNvPr id="1" name=""/>
+        <p:cNvGrpSpPr/>
+        <p:nvPr/>
+      </p:nvGrpSpPr>
+      <p:grpSpPr>
+        <a:xfrm>
+          <a:off x="0" y="0"/>
+          <a:ext cx="0" cy="0"/>
+          <a:chOff x="0" y="0"/>
+          <a:chExt cx="0" cy="0"/>
+        </a:xfrm>
+      </p:grpSpPr>
+      <p:sp>
+        <p:nvSpPr>
+          <p:cNvPr id="2" name="Slide Image Placeholder 1"/>
+          <p:cNvSpPr>
+            <a:spLocks noGrp="1"/>
+          </p:cNvSpPr>
+          <p:nvPr>
+            <p:ph type="sldImg" idx="2"/>
+          </p:nvPr>
+        </p:nvSpPr>
+        <p:spPr/>
+      </p:sp>
+      <p:sp>
+        <p:nvSpPr>
+          <p:cNvPr id="3" name="Notes Placeholder 2"/>
+          <p:cNvSpPr>
+            <a:spLocks noGrp="1"/>
+          </p:cNvSpPr>
+          <p:nvPr>
+            <p:ph type="body" idx="3" sz="quarter"/>
+          </p:nvPr>
+        </p:nvSpPr>
+        <p:spPr/>
+        <p:txBody>
+          <a:bodyPr/>
+          <a:lstStyle/>
+          <a:p>
+            <a:r>
+              <a:t>Aula 9. E depois que o sistema está em produção? Vemos requisitos de auditoria/não-repúdio, monitoração e resposta a incidentes, incluindo o dever legal de comunicar à ANPD. Entregável: trilha de auditoria + plano de resposta (Fase 7).</a:t>
+            </a:r>
+          </a:p>
+        </p:txBody>
+      </p:sp>
+      <p:sp>
+        <p:nvSpPr>
+          <p:cNvPr id="4" name="Slide Number Placeholder 3"/>
+          <p:cNvSpPr>
+            <a:spLocks noGrp="1"/>
+          </p:cNvSpPr>
+          <p:nvPr>
+            <p:ph type="sldNum" idx="5" sz="quarter"/>
+          </p:nvPr>
+        </p:nvSpPr>
+        <p:spPr/>
+      </p:sp>
+    </p:spTree>
+  </p:cSld>
+  <p:clrMapOvr>
+    <a:masterClrMapping/>
+  </p:clrMapOvr>
+</p:notes>
+</file>
+
+<file path=ppt/notesSlides/notesSlide2.xml><?xml version="1.0" encoding="utf-8"?>
+<p:notes xmlns:a="http://schemas.openxmlformats.org/drawingml/2006/main" xmlns:p="http://schemas.openxmlformats.org/presentationml/2006/main" xmlns:r="http://schemas.openxmlformats.org/officeDocument/2006/relationships">
+  <p:cSld>
+    <p:spTree>
+      <p:nvGrpSpPr>
+        <p:cNvPr id="1" name=""/>
+        <p:cNvGrpSpPr/>
+        <p:nvPr/>
+      </p:nvGrpSpPr>
+      <p:grpSpPr>
+        <a:xfrm>
+          <a:off x="0" y="0"/>
+          <a:ext cx="0" cy="0"/>
+          <a:chOff x="0" y="0"/>
+          <a:chExt cx="0" cy="0"/>
+        </a:xfrm>
+      </p:grpSpPr>
+      <p:sp>
+        <p:nvSpPr>
+          <p:cNvPr id="2" name="Slide Image Placeholder 1"/>
+          <p:cNvSpPr>
+            <a:spLocks noGrp="1"/>
+          </p:cNvSpPr>
+          <p:nvPr>
+            <p:ph type="sldImg" idx="2"/>
+          </p:nvPr>
+        </p:nvSpPr>
+        <p:spPr/>
+      </p:sp>
+      <p:sp>
+        <p:nvSpPr>
+          <p:cNvPr id="3" name="Notes Placeholder 2"/>
+          <p:cNvSpPr>
+            <a:spLocks noGrp="1"/>
+          </p:cNvSpPr>
+          <p:nvPr>
+            <p:ph type="body" idx="3" sz="quarter"/>
+          </p:nvPr>
+        </p:nvSpPr>
+        <p:spPr/>
+        <p:txBody>
+          <a:bodyPr/>
+          <a:lstStyle/>
+          <a:p>
+            <a:r>
+              <a:t>Sem trilha de auditoria confiável é impossível provar quem fez o quê — base de LGPD, PCI-DSS e SOX. Registre eventos de segurança (login, acesso negado, ações administrativas), mas NUNCA grave PII/segredos no log (isso vira nova vulnerabilidade). A qualidade importa: log imutável/assinado, com tempo sincronizado. No VidaPlus a auditoria usa hash-chain (cada entrada encadeia a anterior) e user_id opaco.</a:t>
+            </a:r>
+          </a:p>
+        </p:txBody>
+      </p:sp>
+      <p:sp>
+        <p:nvSpPr>
+          <p:cNvPr id="4" name="Slide Number Placeholder 3"/>
+          <p:cNvSpPr>
+            <a:spLocks noGrp="1"/>
+          </p:cNvSpPr>
+          <p:nvPr>
+            <p:ph type="sldNum" idx="5" sz="quarter"/>
+          </p:nvPr>
+        </p:nvSpPr>
+        <p:spPr/>
+      </p:sp>
+    </p:spTree>
+  </p:cSld>
+  <p:clrMapOvr>
+    <a:masterClrMapping/>
+  </p:clrMapOvr>
+</p:notes>
+</file>
+
+<file path=ppt/notesSlides/notesSlide3.xml><?xml version="1.0" encoding="utf-8"?>
+<p:notes xmlns:a="http://schemas.openxmlformats.org/drawingml/2006/main" xmlns:p="http://schemas.openxmlformats.org/presentationml/2006/main" xmlns:r="http://schemas.openxmlformats.org/officeDocument/2006/relationships">
+  <p:cSld>
+    <p:spTree>
+      <p:nvGrpSpPr>
+        <p:cNvPr id="1" name=""/>
+        <p:cNvGrpSpPr/>
+        <p:nvPr/>
+      </p:nvGrpSpPr>
+      <p:grpSpPr>
+        <a:xfrm>
+          <a:off x="0" y="0"/>
+          <a:ext cx="0" cy="0"/>
+          <a:chOff x="0" y="0"/>
+          <a:chExt cx="0" cy="0"/>
+        </a:xfrm>
+      </p:grpSpPr>
+      <p:sp>
+        <p:nvSpPr>
+          <p:cNvPr id="2" name="Slide Image Placeholder 1"/>
+          <p:cNvSpPr>
+            <a:spLocks noGrp="1"/>
+          </p:cNvSpPr>
+          <p:nvPr>
+            <p:ph type="sldImg" idx="2"/>
+          </p:nvPr>
+        </p:nvSpPr>
+        <p:spPr/>
+      </p:sp>
+      <p:sp>
+        <p:nvSpPr>
+          <p:cNvPr id="3" name="Notes Placeholder 2"/>
+          <p:cNvSpPr>
+            <a:spLocks noGrp="1"/>
+          </p:cNvSpPr>
+          <p:nvPr>
+            <p:ph type="body" idx="3" sz="quarter"/>
+          </p:nvPr>
+        </p:nvSpPr>
+        <p:spPr/>
+        <p:txBody>
+          <a:bodyPr/>
+          <a:lstStyle/>
+          <a:p>
+            <a:r>
+              <a:t>Operação também se mede. MTTD (tempo de detecção) e MTTR (tempo de remediação) são as métricas-chave: quanto menores, mais madura a operação. O objetivo é reduzir o escape rate (bugs que vazam para produção) ao longo do tempo. Estas métricas complementam as de processo (% de ameaças com controle, % de requisitos com teste).</a:t>
+            </a:r>
+          </a:p>
+        </p:txBody>
+      </p:sp>
+      <p:sp>
+        <p:nvSpPr>
+          <p:cNvPr id="4" name="Slide Number Placeholder 3"/>
+          <p:cNvSpPr>
+            <a:spLocks noGrp="1"/>
+          </p:cNvSpPr>
+          <p:nvPr>
+            <p:ph type="sldNum" idx="5" sz="quarter"/>
+          </p:nvPr>
+        </p:nvSpPr>
+        <p:spPr/>
+      </p:sp>
+    </p:spTree>
+  </p:cSld>
+  <p:clrMapOvr>
+    <a:masterClrMapping/>
+  </p:clrMapOvr>
+</p:notes>
+</file>
+
+<file path=ppt/notesSlides/notesSlide4.xml><?xml version="1.0" encoding="utf-8"?>
+<p:notes xmlns:a="http://schemas.openxmlformats.org/drawingml/2006/main" xmlns:p="http://schemas.openxmlformats.org/presentationml/2006/main" xmlns:r="http://schemas.openxmlformats.org/officeDocument/2006/relationships">
+  <p:cSld>
+    <p:spTree>
+      <p:nvGrpSpPr>
+        <p:cNvPr id="1" name=""/>
+        <p:cNvGrpSpPr/>
+        <p:nvPr/>
+      </p:nvGrpSpPr>
+      <p:grpSpPr>
+        <a:xfrm>
+          <a:off x="0" y="0"/>
+          <a:ext cx="0" cy="0"/>
+          <a:chOff x="0" y="0"/>
+          <a:chExt cx="0" cy="0"/>
+        </a:xfrm>
+      </p:grpSpPr>
+      <p:sp>
+        <p:nvSpPr>
+          <p:cNvPr id="2" name="Slide Image Placeholder 1"/>
+          <p:cNvSpPr>
+            <a:spLocks noGrp="1"/>
+          </p:cNvSpPr>
+          <p:nvPr>
+            <p:ph type="sldImg" idx="2"/>
+          </p:nvPr>
+        </p:nvSpPr>
+        <p:spPr/>
+      </p:sp>
+      <p:sp>
+        <p:nvSpPr>
+          <p:cNvPr id="3" name="Notes Placeholder 2"/>
+          <p:cNvSpPr>
+            <a:spLocks noGrp="1"/>
+          </p:cNvSpPr>
+          <p:nvPr>
+            <p:ph type="body" idx="3" sz="quarter"/>
+          </p:nvPr>
+        </p:nvSpPr>
+        <p:spPr/>
+        <p:txBody>
+          <a:bodyPr/>
+          <a:lstStyle/>
+          <a:p>
+            <a:r>
+              <a:t>O ciclo de resposta a incidentes: detectar, conter, erradicar, recuperar, notificar e aprender. A LGPD (art. 48) obriga a comunicar à ANPD e ao titular quando há risco/dano relevante — com prazo e conteúdo mínimo. O post-mortem (sem culpados) realimenta os requisitos: o incidente vira novo requisito de segurança.</a:t>
+            </a:r>
+          </a:p>
+        </p:txBody>
+      </p:sp>
+      <p:sp>
+        <p:nvSpPr>
+          <p:cNvPr id="4" name="Slide Number Placeholder 3"/>
+          <p:cNvSpPr>
+            <a:spLocks noGrp="1"/>
+          </p:cNvSpPr>
+          <p:nvPr>
+            <p:ph type="sldNum" idx="5" sz="quarter"/>
+          </p:nvPr>
+        </p:nvSpPr>
+        <p:spPr/>
+      </p:sp>
+    </p:spTree>
+  </p:cSld>
+  <p:clrMapOvr>
+    <a:masterClrMapping/>
+  </p:clrMapOvr>
+</p:notes>
+</file>
+
+<file path=ppt/notesSlides/notesSlide5.xml><?xml version="1.0" encoding="utf-8"?>
+<p:notes xmlns:a="http://schemas.openxmlformats.org/drawingml/2006/main" xmlns:p="http://schemas.openxmlformats.org/presentationml/2006/main" xmlns:r="http://schemas.openxmlformats.org/officeDocument/2006/relationships">
+  <p:cSld>
+    <p:spTree>
+      <p:nvGrpSpPr>
+        <p:cNvPr id="1" name=""/>
+        <p:cNvGrpSpPr/>
+        <p:nvPr/>
+      </p:nvGrpSpPr>
+      <p:grpSpPr>
+        <a:xfrm>
+          <a:off x="0" y="0"/>
+          <a:ext cx="0" cy="0"/>
+          <a:chOff x="0" y="0"/>
+          <a:chExt cx="0" cy="0"/>
+        </a:xfrm>
+      </p:grpSpPr>
+      <p:sp>
+        <p:nvSpPr>
+          <p:cNvPr id="2" name="Slide Image Placeholder 1"/>
+          <p:cNvSpPr>
+            <a:spLocks noGrp="1"/>
+          </p:cNvSpPr>
+          <p:nvPr>
+            <p:ph type="sldImg" idx="2"/>
+          </p:nvPr>
+        </p:nvSpPr>
+        <p:spPr/>
+      </p:sp>
+      <p:sp>
+        <p:nvSpPr>
+          <p:cNvPr id="3" name="Notes Placeholder 2"/>
+          <p:cNvSpPr>
+            <a:spLocks noGrp="1"/>
+          </p:cNvSpPr>
+          <p:nvPr>
+            <p:ph type="body" idx="3" sz="quarter"/>
+          </p:nvPr>
+        </p:nvSpPr>
+        <p:spPr/>
+        <p:txBody>
+          <a:bodyPr/>
+          <a:lstStyle/>
+          <a:p>
+            <a:r>
+              <a:t>Entregável: a trilha de auditoria funcionando (com verificação de integridade) e um runbook de resposta a incidente para o cenário 'vazamento de laudo'. Teste que adulterar uma entrada quebra a verificação da cadeia — é o que garante o não-repúdio.</a:t>
+            </a:r>
+          </a:p>
+        </p:txBody>
+      </p:sp>
+      <p:sp>
+        <p:nvSpPr>
+          <p:cNvPr id="4" name="Slide Number Placeholder 3"/>
+          <p:cNvSpPr>
+            <a:spLocks noGrp="1"/>
+          </p:cNvSpPr>
+          <p:nvPr>
+            <p:ph type="sldNum" idx="5" sz="quarter"/>
+          </p:nvPr>
+        </p:nvSpPr>
+        <p:spPr/>
+      </p:sp>
+    </p:spTree>
+  </p:cSld>
+  <p:clrMapOvr>
+    <a:masterClrMapping/>
+  </p:clrMapOvr>
+</p:notes>
 </file>
 
 <file path=ppt/slideLayouts/slideLayout1.xml><?xml version="1.0" encoding="utf-8"?>
@@ -4277,7 +4977,7 @@
                 </a:solidFill>
                 <a:latin typeface="Open Sans"/>
               </a:rPr>
-              <a:t>Integridade: imutável/assinado.</a:t>
+              <a:t>Integridade: imutável / assinado.</a:t>
             </a:r>
           </a:p>
           <a:p>
@@ -4333,7 +5033,7 @@
                 </a:solidFill>
                 <a:latin typeface="Open Sans"/>
               </a:rPr>
-              <a:t>Retenção conforme lei.</a:t>
+              <a:t>Retenção conforme política e lei.</a:t>
             </a:r>
           </a:p>
           <a:p>
@@ -4935,7 +5635,7 @@
                 </a:solidFill>
                 <a:latin typeface="Open Sans"/>
               </a:rPr>
-              <a:t>tempo até detectar (média atual: 194 dias)</a:t>
+              <a:t>tempo até detectar (média atual do setor: 194 dias)</a:t>
             </a:r>
           </a:p>
         </p:txBody>
@@ -5162,7 +5862,7 @@
                 </a:solidFill>
                 <a:latin typeface="Open Sans"/>
               </a:rPr>
-              <a:t>%Cobertura</a:t>
+              <a:t>% Cobertura</a:t>
             </a:r>
           </a:p>
         </p:txBody>
@@ -5207,7 +5907,7 @@
                 </a:solidFill>
                 <a:latin typeface="Open Sans"/>
               </a:rPr>
-              <a:t>código + deps escaneados</a:t>
+              <a:t>código + dependências escaneados regularmente</a:t>
             </a:r>
           </a:p>
         </p:txBody>
@@ -5990,7 +6690,7 @@
                 </a:solidFill>
                 <a:latin typeface="Open Sans"/>
               </a:rPr>
-              <a:t>revogar sessão, bloquear endpoint</a:t>
+              <a:t>revogar sessão, bloquear o endpoint afetado</a:t>
             </a:r>
           </a:p>
         </p:txBody>
@@ -6215,7 +6915,7 @@
                 </a:solidFill>
                 <a:latin typeface="Open Sans"/>
               </a:rPr>
-              <a:t>corrigir a causa (ex.: IDOR)</a:t>
+              <a:t>corrigir a causa-raiz (ex.: o IDOR)</a:t>
             </a:r>
           </a:p>
         </p:txBody>
@@ -6440,7 +7140,7 @@
                 </a:solidFill>
                 <a:latin typeface="Open Sans"/>
               </a:rPr>
-              <a:t>restaurar e validar</a:t>
+              <a:t>restaurar o serviço e validar</a:t>
             </a:r>
           </a:p>
         </p:txBody>
@@ -6665,7 +7365,7 @@
                 </a:solidFill>
                 <a:latin typeface="Open Sans"/>
               </a:rPr>
-              <a:t>ANPD e titular (LGPD art. 48)</a:t>
+              <a:t>comunicar ANPD e titular (LGPD art. 48)</a:t>
             </a:r>
           </a:p>
         </p:txBody>
@@ -7515,7 +8215,7 @@
                 </a:solidFill>
                 <a:latin typeface="Open Sans"/>
               </a:rPr>
-              <a:t>escreva a resposta a um vazamento de laudo.</a:t>
+              <a:t>escreva a resposta a um vazamento de laudo, passo a passo.</a:t>
             </a:r>
           </a:p>
           <a:p>
@@ -7589,7 +8289,7 @@
                 </a:solidFill>
                 <a:latin typeface="Open Sans"/>
               </a:rPr>
-              <a:t>adulterar uma entrada deve ser detectável.</a:t>
+              <a:t>adulterar uma entrada do log deve ser detectável.</a:t>
             </a:r>
           </a:p>
         </p:txBody>
@@ -8275,4 +8975,324 @@
   </a:objectDefaults>
   <a:extraClrSchemeLst/>
 </a:theme>
+</file>
+
+<file path=ppt/theme/theme2.xml><?xml version="1.0" encoding="utf-8"?>
+<a:theme xmlns:a="http://schemas.openxmlformats.org/drawingml/2006/main" name="Office Theme">
+  <a:themeElements>
+    <a:clrScheme name="Office">
+      <a:dk1>
+        <a:sysClr val="windowText" lastClr="000000"/>
+      </a:dk1>
+      <a:lt1>
+        <a:sysClr val="window" lastClr="FFFFFF"/>
+      </a:lt1>
+      <a:dk2>
+        <a:srgbClr val="1F497D"/>
+      </a:dk2>
+      <a:lt2>
+        <a:srgbClr val="EEECE1"/>
+      </a:lt2>
+      <a:accent1>
+        <a:srgbClr val="4F81BD"/>
+      </a:accent1>
+      <a:accent2>
+        <a:srgbClr val="C0504D"/>
+      </a:accent2>
+      <a:accent3>
+        <a:srgbClr val="9BBB59"/>
+      </a:accent3>
+      <a:accent4>
+        <a:srgbClr val="8064A2"/>
+      </a:accent4>
+      <a:accent5>
+        <a:srgbClr val="4BACC6"/>
+      </a:accent5>
+      <a:accent6>
+        <a:srgbClr val="F79646"/>
+      </a:accent6>
+      <a:hlink>
+        <a:srgbClr val="0000FF"/>
+      </a:hlink>
+      <a:folHlink>
+        <a:srgbClr val="800080"/>
+      </a:folHlink>
+    </a:clrScheme>
+    <a:fontScheme name="Office">
+      <a:majorFont>
+        <a:latin typeface="Calibri"/>
+        <a:ea typeface=""/>
+        <a:cs typeface=""/>
+        <a:font script="Jpan" typeface="ＭＳ Ｐゴシック"/>
+        <a:font script="Hang" typeface="맑은 고딕"/>
+        <a:font script="Hans" typeface="宋体"/>
+        <a:font script="Hant" typeface="新細明體"/>
+        <a:font script="Arab" typeface="Times New Roman"/>
+        <a:font script="Hebr" typeface="Times New Roman"/>
+        <a:font script="Thai" typeface="Angsana New"/>
+        <a:font script="Ethi" typeface="Nyala"/>
+        <a:font script="Beng" typeface="Vrinda"/>
+        <a:font script="Gujr" typeface="Shruti"/>
+        <a:font script="Khmr" typeface="MoolBoran"/>
+        <a:font script="Knda" typeface="Tunga"/>
+        <a:font script="Guru" typeface="Raavi"/>
+        <a:font script="Cans" typeface="Euphemia"/>
+        <a:font script="Cher" typeface="Plantagenet Cherokee"/>
+        <a:font script="Yiii" typeface="Microsoft Yi Baiti"/>
+        <a:font script="Tibt" typeface="Microsoft Himalaya"/>
+        <a:font script="Thaa" typeface="MV Boli"/>
+        <a:font script="Deva" typeface="Mangal"/>
+        <a:font script="Telu" typeface="Gautami"/>
+        <a:font script="Taml" typeface="Latha"/>
+        <a:font script="Syrc" typeface="Estrangelo Edessa"/>
+        <a:font script="Orya" typeface="Kalinga"/>
+        <a:font script="Mlym" typeface="Kartika"/>
+        <a:font script="Laoo" typeface="DokChampa"/>
+        <a:font script="Sinh" typeface="Iskoola Pota"/>
+        <a:font script="Mong" typeface="Mongolian Baiti"/>
+        <a:font script="Viet" typeface="Times New Roman"/>
+        <a:font script="Uigh" typeface="Microsoft Uighur"/>
+        <a:font script="Geor" typeface="Sylfaen"/>
+      </a:majorFont>
+      <a:minorFont>
+        <a:latin typeface="Calibri"/>
+        <a:ea typeface=""/>
+        <a:cs typeface=""/>
+        <a:font script="Jpan" typeface="ＭＳ Ｐゴシック"/>
+        <a:font script="Hang" typeface="맑은 고딕"/>
+        <a:font script="Hans" typeface="宋体"/>
+        <a:font script="Hant" typeface="新細明體"/>
+        <a:font script="Arab" typeface="Arial"/>
+        <a:font script="Hebr" typeface="Arial"/>
+        <a:font script="Thai" typeface="Cordia New"/>
+        <a:font script="Ethi" typeface="Nyala"/>
+        <a:font script="Beng" typeface="Vrinda"/>
+        <a:font script="Gujr" typeface="Shruti"/>
+        <a:font script="Khmr" typeface="DaunPenh"/>
+        <a:font script="Knda" typeface="Tunga"/>
+        <a:font script="Guru" typeface="Raavi"/>
+        <a:font script="Cans" typeface="Euphemia"/>
+        <a:font script="Cher" typeface="Plantagenet Cherokee"/>
+        <a:font script="Yiii" typeface="Microsoft Yi Baiti"/>
+        <a:font script="Tibt" typeface="Microsoft Himalaya"/>
+        <a:font script="Thaa" typeface="MV Boli"/>
+        <a:font script="Deva" typeface="Mangal"/>
+        <a:font script="Telu" typeface="Gautami"/>
+        <a:font script="Taml" typeface="Latha"/>
+        <a:font script="Syrc" typeface="Estrangelo Edessa"/>
+        <a:font script="Orya" typeface="Kalinga"/>
+        <a:font script="Mlym" typeface="Kartika"/>
+        <a:font script="Laoo" typeface="DokChampa"/>
+        <a:font script="Sinh" typeface="Iskoola Pota"/>
+        <a:font script="Mong" typeface="Mongolian Baiti"/>
+        <a:font script="Viet" typeface="Arial"/>
+        <a:font script="Uigh" typeface="Microsoft Uighur"/>
+        <a:font script="Geor" typeface="Sylfaen"/>
+      </a:minorFont>
+    </a:fontScheme>
+    <a:fmtScheme name="Office">
+      <a:fillStyleLst>
+        <a:solidFill>
+          <a:schemeClr val="phClr"/>
+        </a:solidFill>
+        <a:gradFill rotWithShape="1">
+          <a:gsLst>
+            <a:gs pos="0">
+              <a:schemeClr val="phClr">
+                <a:tint val="50000"/>
+                <a:satMod val="300000"/>
+              </a:schemeClr>
+            </a:gs>
+            <a:gs pos="35000">
+              <a:schemeClr val="phClr">
+                <a:tint val="37000"/>
+                <a:satMod val="300000"/>
+              </a:schemeClr>
+            </a:gs>
+            <a:gs pos="100000">
+              <a:schemeClr val="phClr">
+                <a:tint val="15000"/>
+                <a:satMod val="350000"/>
+              </a:schemeClr>
+            </a:gs>
+          </a:gsLst>
+          <a:lin ang="16200000" scaled="1"/>
+        </a:gradFill>
+        <a:gradFill rotWithShape="1">
+          <a:gsLst>
+            <a:gs pos="0">
+              <a:schemeClr val="phClr">
+                <a:tint val="100000"/>
+                <a:shade val="100000"/>
+                <a:satMod val="130000"/>
+              </a:schemeClr>
+            </a:gs>
+            <a:gs pos="100000">
+              <a:schemeClr val="phClr">
+                <a:tint val="50000"/>
+                <a:shade val="100000"/>
+                <a:satMod val="350000"/>
+              </a:schemeClr>
+            </a:gs>
+          </a:gsLst>
+          <a:lin ang="16200000" scaled="0"/>
+        </a:gradFill>
+      </a:fillStyleLst>
+      <a:lnStyleLst>
+        <a:ln w="9525" cap="flat" cmpd="sng" algn="ctr">
+          <a:solidFill>
+            <a:schemeClr val="phClr">
+              <a:shade val="95000"/>
+              <a:satMod val="105000"/>
+            </a:schemeClr>
+          </a:solidFill>
+          <a:prstDash val="solid"/>
+        </a:ln>
+        <a:ln w="25400" cap="flat" cmpd="sng" algn="ctr">
+          <a:solidFill>
+            <a:schemeClr val="phClr"/>
+          </a:solidFill>
+          <a:prstDash val="solid"/>
+        </a:ln>
+        <a:ln w="38100" cap="flat" cmpd="sng" algn="ctr">
+          <a:solidFill>
+            <a:schemeClr val="phClr"/>
+          </a:solidFill>
+          <a:prstDash val="solid"/>
+        </a:ln>
+      </a:lnStyleLst>
+      <a:effectStyleLst>
+        <a:effectStyle>
+          <a:effectLst>
+            <a:outerShdw blurRad="40000" dist="20000" dir="5400000" rotWithShape="0">
+              <a:srgbClr val="000000">
+                <a:alpha val="38000"/>
+              </a:srgbClr>
+            </a:outerShdw>
+          </a:effectLst>
+        </a:effectStyle>
+        <a:effectStyle>
+          <a:effectLst>
+            <a:outerShdw blurRad="40000" dist="23000" dir="5400000" rotWithShape="0">
+              <a:srgbClr val="000000">
+                <a:alpha val="35000"/>
+              </a:srgbClr>
+            </a:outerShdw>
+          </a:effectLst>
+        </a:effectStyle>
+        <a:effectStyle>
+          <a:effectLst>
+            <a:outerShdw blurRad="40000" dist="23000" dir="5400000" rotWithShape="0">
+              <a:srgbClr val="000000">
+                <a:alpha val="35000"/>
+              </a:srgbClr>
+            </a:outerShdw>
+          </a:effectLst>
+          <a:scene3d>
+            <a:camera prst="orthographicFront">
+              <a:rot lat="0" lon="0" rev="0"/>
+            </a:camera>
+            <a:lightRig rig="threePt" dir="t">
+              <a:rot lat="0" lon="0" rev="1200000"/>
+            </a:lightRig>
+          </a:scene3d>
+          <a:sp3d>
+            <a:bevelT w="63500" h="25400"/>
+          </a:sp3d>
+        </a:effectStyle>
+      </a:effectStyleLst>
+      <a:bgFillStyleLst>
+        <a:solidFill>
+          <a:schemeClr val="phClr"/>
+        </a:solidFill>
+        <a:gradFill rotWithShape="1">
+          <a:gsLst>
+            <a:gs pos="0">
+              <a:schemeClr val="phClr">
+                <a:tint val="40000"/>
+                <a:satMod val="350000"/>
+              </a:schemeClr>
+            </a:gs>
+            <a:gs pos="40000">
+              <a:schemeClr val="phClr">
+                <a:tint val="45000"/>
+                <a:shade val="99000"/>
+                <a:satMod val="350000"/>
+              </a:schemeClr>
+            </a:gs>
+            <a:gs pos="100000">
+              <a:schemeClr val="phClr">
+                <a:shade val="20000"/>
+                <a:satMod val="255000"/>
+              </a:schemeClr>
+            </a:gs>
+          </a:gsLst>
+          <a:path path="circle">
+            <a:fillToRect l="50000" t="-80000" r="50000" b="180000"/>
+          </a:path>
+        </a:gradFill>
+        <a:gradFill rotWithShape="1">
+          <a:gsLst>
+            <a:gs pos="0">
+              <a:schemeClr val="phClr">
+                <a:tint val="80000"/>
+                <a:satMod val="300000"/>
+              </a:schemeClr>
+            </a:gs>
+            <a:gs pos="100000">
+              <a:schemeClr val="phClr">
+                <a:shade val="30000"/>
+                <a:satMod val="200000"/>
+              </a:schemeClr>
+            </a:gs>
+          </a:gsLst>
+          <a:path path="circle">
+            <a:fillToRect l="50000" t="50000" r="50000" b="50000"/>
+          </a:path>
+        </a:gradFill>
+      </a:bgFillStyleLst>
+    </a:fmtScheme>
+  </a:themeElements>
+  <a:objectDefaults>
+    <a:spDef>
+      <a:spPr/>
+      <a:bodyPr/>
+      <a:lstStyle/>
+      <a:style>
+        <a:lnRef idx="1">
+          <a:schemeClr val="accent1"/>
+        </a:lnRef>
+        <a:fillRef idx="3">
+          <a:schemeClr val="accent1"/>
+        </a:fillRef>
+        <a:effectRef idx="2">
+          <a:schemeClr val="accent1"/>
+        </a:effectRef>
+        <a:fontRef idx="minor">
+          <a:schemeClr val="lt1"/>
+        </a:fontRef>
+      </a:style>
+    </a:spDef>
+    <a:lnDef>
+      <a:spPr/>
+      <a:bodyPr/>
+      <a:lstStyle/>
+      <a:style>
+        <a:lnRef idx="2">
+          <a:schemeClr val="accent1"/>
+        </a:lnRef>
+        <a:fillRef idx="0">
+          <a:schemeClr val="accent1"/>
+        </a:fillRef>
+        <a:effectRef idx="1">
+          <a:schemeClr val="accent1"/>
+        </a:effectRef>
+        <a:fontRef idx="minor">
+          <a:schemeClr val="tx1"/>
+        </a:fontRef>
+      </a:style>
+    </a:lnDef>
+  </a:objectDefaults>
+  <a:extraClrSchemeLst/>
+</a:theme>
 </file>
--- a/aulas/aula-09-operacao-incidentes.pptx
+++ b/aulas/aula-09-operacao-incidentes.pptx
@@ -14,6 +14,7 @@
     <p:sldId id="262" r:id="rId14"/>
     <p:sldId id="263" r:id="rId15"/>
     <p:sldId id="264" r:id="rId16"/>
+    <p:sldId id="265" r:id="rId17"/>
   </p:sldIdLst>
   <p:sldSz cx="12191695" cy="6858000" type="screen4x3"/>
   <p:notesSz cx="6858000" cy="9144000"/>
@@ -746,6 +747,76 @@
 </file>
 
 <file path=ppt/notesSlides/notesSlide5.xml><?xml version="1.0" encoding="utf-8"?>
+<p:notes xmlns:a="http://schemas.openxmlformats.org/drawingml/2006/main" xmlns:p="http://schemas.openxmlformats.org/presentationml/2006/main" xmlns:r="http://schemas.openxmlformats.org/officeDocument/2006/relationships">
+  <p:cSld>
+    <p:spTree>
+      <p:nvGrpSpPr>
+        <p:cNvPr id="1" name=""/>
+        <p:cNvGrpSpPr/>
+        <p:nvPr/>
+      </p:nvGrpSpPr>
+      <p:grpSpPr>
+        <a:xfrm>
+          <a:off x="0" y="0"/>
+          <a:ext cx="0" cy="0"/>
+          <a:chOff x="0" y="0"/>
+          <a:chExt cx="0" cy="0"/>
+        </a:xfrm>
+      </p:grpSpPr>
+      <p:sp>
+        <p:nvSpPr>
+          <p:cNvPr id="2" name="Slide Image Placeholder 1"/>
+          <p:cNvSpPr>
+            <a:spLocks noGrp="1"/>
+          </p:cNvSpPr>
+          <p:nvPr>
+            <p:ph type="sldImg" idx="2"/>
+          </p:nvPr>
+        </p:nvSpPr>
+        <p:spPr/>
+      </p:sp>
+      <p:sp>
+        <p:nvSpPr>
+          <p:cNvPr id="3" name="Notes Placeholder 2"/>
+          <p:cNvSpPr>
+            <a:spLocks noGrp="1"/>
+          </p:cNvSpPr>
+          <p:nvPr>
+            <p:ph type="body" idx="3" sz="quarter"/>
+          </p:nvPr>
+        </p:nvSpPr>
+        <p:spPr/>
+        <p:txBody>
+          <a:bodyPr/>
+          <a:lstStyle/>
+          <a:p>
+            <a:r>
+              <a:t>Exemplo concreto do VidaPlus — é este o modelo que o grupo escreve e adapta no entregável. Cenário: a auditoria detecta que o paciente A baixou o laudo do paciente B (IDOR, V-03). Note a ordem: primeiro CONTER (revogar sessão, bloquear o endpoint) para estancar, sem apagar log — a trilha é a prova; só então ERRADICAR a causa-raiz (validar ownership no servidor). Dado de saúde é sensível, então quase sempre há 'risco relevante' -&gt; notificar ANPD e titulares em até 3 dias úteis, com o conteúdo do art. 48. Por fim, o post-mortem vira um novo requisito (ex.: teste anti-IDOR obrigatório + alerta de acesso cross-owner) e entra na matriz de rastreabilidade.</a:t>
+            </a:r>
+          </a:p>
+        </p:txBody>
+      </p:sp>
+      <p:sp>
+        <p:nvSpPr>
+          <p:cNvPr id="4" name="Slide Number Placeholder 3"/>
+          <p:cNvSpPr>
+            <a:spLocks noGrp="1"/>
+          </p:cNvSpPr>
+          <p:nvPr>
+            <p:ph type="sldNum" idx="5" sz="quarter"/>
+          </p:nvPr>
+        </p:nvSpPr>
+        <p:spPr/>
+      </p:sp>
+    </p:spTree>
+  </p:cSld>
+  <p:clrMapOvr>
+    <a:masterClrMapping/>
+  </p:clrMapOvr>
+</p:notes>
+</file>
+
+<file path=ppt/notesSlides/notesSlide6.xml><?xml version="1.0" encoding="utf-8"?>
 <p:notes xmlns:a="http://schemas.openxmlformats.org/drawingml/2006/main" xmlns:p="http://schemas.openxmlformats.org/presentationml/2006/main" xmlns:r="http://schemas.openxmlformats.org/officeDocument/2006/relationships">
   <p:cSld>
     <p:spTree>
@@ -4141,6 +4212,316 @@
 </p:sld>
 </file>
 
+<file path=ppt/slides/slide10.xml><?xml version="1.0" encoding="utf-8"?>
+<p:sld xmlns:a="http://schemas.openxmlformats.org/drawingml/2006/main" xmlns:p="http://schemas.openxmlformats.org/presentationml/2006/main" xmlns:r="http://schemas.openxmlformats.org/officeDocument/2006/relationships">
+  <p:cSld>
+    <p:spTree>
+      <p:nvGrpSpPr>
+        <p:cNvPr id="1" name=""/>
+        <p:cNvGrpSpPr/>
+        <p:nvPr/>
+      </p:nvGrpSpPr>
+      <p:grpSpPr/>
+      <p:sp>
+        <p:nvSpPr>
+          <p:cNvPr id="2" name="Rectangle 1"/>
+          <p:cNvSpPr/>
+          <p:nvPr/>
+        </p:nvSpPr>
+        <p:spPr>
+          <a:xfrm>
+            <a:off x="0" y="0"/>
+            <a:ext cx="12191695" cy="6858000"/>
+          </a:xfrm>
+          <a:prstGeom prst="rect">
+            <a:avLst/>
+          </a:prstGeom>
+          <a:solidFill>
+            <a:srgbClr val="1F5232"/>
+          </a:solidFill>
+          <a:ln>
+            <a:noFill/>
+          </a:ln>
+          <a:effectLst/>
+        </p:spPr>
+        <p:style>
+          <a:lnRef idx="1">
+            <a:schemeClr val="accent1"/>
+          </a:lnRef>
+          <a:fillRef idx="3">
+            <a:schemeClr val="accent1"/>
+          </a:fillRef>
+          <a:effectRef idx="2">
+            <a:schemeClr val="accent1"/>
+          </a:effectRef>
+          <a:fontRef idx="minor">
+            <a:schemeClr val="lt1"/>
+          </a:fontRef>
+        </p:style>
+        <p:txBody>
+          <a:bodyPr rtlCol="0" anchor="ctr"/>
+          <a:lstStyle/>
+          <a:p>
+            <a:pPr algn="ctr"/>
+          </a:p>
+        </p:txBody>
+      </p:sp>
+      <p:pic>
+        <p:nvPicPr>
+          <p:cNvPr id="3" name="Picture 2" descr="logo_branco.png"/>
+          <p:cNvPicPr>
+            <a:picLocks noChangeAspect="1"/>
+          </p:cNvPicPr>
+          <p:nvPr/>
+        </p:nvPicPr>
+        <p:blipFill>
+          <a:blip r:embed="rId2"/>
+          <a:stretch>
+            <a:fillRect/>
+          </a:stretch>
+        </p:blipFill>
+        <p:spPr>
+          <a:xfrm>
+            <a:off x="4142232" y="548640"/>
+            <a:ext cx="3909060" cy="868680"/>
+          </a:xfrm>
+          <a:prstGeom prst="rect">
+            <a:avLst/>
+          </a:prstGeom>
+        </p:spPr>
+      </p:pic>
+      <p:sp>
+        <p:nvSpPr>
+          <p:cNvPr id="4" name="TextBox 3"/>
+          <p:cNvSpPr txBox="1"/>
+          <p:nvPr/>
+        </p:nvSpPr>
+        <p:spPr>
+          <a:xfrm>
+            <a:off x="457200" y="2194560"/>
+            <a:ext cx="11247120" cy="1371600"/>
+          </a:xfrm>
+          <a:prstGeom prst="rect">
+            <a:avLst/>
+          </a:prstGeom>
+          <a:noFill/>
+        </p:spPr>
+        <p:txBody>
+          <a:bodyPr wrap="square" anchor="t" lIns="0" rIns="0" tIns="0" bIns="0">
+            <a:spAutoFit/>
+          </a:bodyPr>
+          <a:lstStyle/>
+          <a:p>
+            <a:pPr algn="ctr">
+              <a:lnSpc>
+                <a:spcPct val="100000"/>
+              </a:lnSpc>
+              <a:spcBef>
+                <a:spcPts val="0"/>
+              </a:spcBef>
+              <a:spcAft>
+                <a:spcPts val="600"/>
+              </a:spcAft>
+            </a:pPr>
+            <a:r>
+              <a:rPr sz="8800" b="1" i="0">
+                <a:solidFill>
+                  <a:srgbClr val="7CB342"/>
+                </a:solidFill>
+                <a:latin typeface="Open Sans"/>
+              </a:rPr>
+              <a:t>Perguntas?</a:t>
+            </a:r>
+          </a:p>
+        </p:txBody>
+      </p:sp>
+      <p:sp>
+        <p:nvSpPr>
+          <p:cNvPr id="5" name="Rectangle 4"/>
+          <p:cNvSpPr/>
+          <p:nvPr/>
+        </p:nvSpPr>
+        <p:spPr>
+          <a:xfrm>
+            <a:off x="5184648" y="3977639"/>
+            <a:ext cx="1828800" cy="25400"/>
+          </a:xfrm>
+          <a:prstGeom prst="rect">
+            <a:avLst/>
+          </a:prstGeom>
+          <a:solidFill>
+            <a:srgbClr val="7CB342"/>
+          </a:solidFill>
+          <a:ln>
+            <a:noFill/>
+          </a:ln>
+          <a:effectLst/>
+        </p:spPr>
+        <p:style>
+          <a:lnRef idx="1">
+            <a:schemeClr val="accent1"/>
+          </a:lnRef>
+          <a:fillRef idx="3">
+            <a:schemeClr val="accent1"/>
+          </a:fillRef>
+          <a:effectRef idx="2">
+            <a:schemeClr val="accent1"/>
+          </a:effectRef>
+          <a:fontRef idx="minor">
+            <a:schemeClr val="lt1"/>
+          </a:fontRef>
+        </p:style>
+        <p:txBody>
+          <a:bodyPr rtlCol="0" anchor="ctr"/>
+          <a:lstStyle/>
+          <a:p>
+            <a:pPr algn="ctr"/>
+          </a:p>
+        </p:txBody>
+      </p:sp>
+      <p:sp>
+        <p:nvSpPr>
+          <p:cNvPr id="6" name="TextBox 5"/>
+          <p:cNvSpPr txBox="1"/>
+          <p:nvPr/>
+        </p:nvSpPr>
+        <p:spPr>
+          <a:xfrm>
+            <a:off x="457200" y="4297680"/>
+            <a:ext cx="11247120" cy="457200"/>
+          </a:xfrm>
+          <a:prstGeom prst="rect">
+            <a:avLst/>
+          </a:prstGeom>
+          <a:noFill/>
+        </p:spPr>
+        <p:txBody>
+          <a:bodyPr wrap="square" anchor="t" lIns="0" rIns="0" tIns="0" bIns="0">
+            <a:spAutoFit/>
+          </a:bodyPr>
+          <a:lstStyle/>
+          <a:p>
+            <a:pPr algn="ctr">
+              <a:lnSpc>
+                <a:spcPct val="100000"/>
+              </a:lnSpc>
+              <a:spcBef>
+                <a:spcPts val="0"/>
+              </a:spcBef>
+              <a:spcAft>
+                <a:spcPts val="600"/>
+              </a:spcAft>
+            </a:pPr>
+            <a:r>
+              <a:rPr sz="2200" b="1" i="0">
+                <a:solidFill>
+                  <a:srgbClr val="FFFFFF"/>
+                </a:solidFill>
+                <a:latin typeface="Open Sans"/>
+              </a:rPr>
+              <a:t>Prof. Dr. Alex Mulattieri Suarez Orozco</a:t>
+            </a:r>
+          </a:p>
+        </p:txBody>
+      </p:sp>
+      <p:sp>
+        <p:nvSpPr>
+          <p:cNvPr id="7" name="TextBox 6"/>
+          <p:cNvSpPr txBox="1"/>
+          <p:nvPr/>
+        </p:nvSpPr>
+        <p:spPr>
+          <a:xfrm>
+            <a:off x="457200" y="4800600"/>
+            <a:ext cx="11247120" cy="457200"/>
+          </a:xfrm>
+          <a:prstGeom prst="rect">
+            <a:avLst/>
+          </a:prstGeom>
+          <a:noFill/>
+        </p:spPr>
+        <p:txBody>
+          <a:bodyPr wrap="square" anchor="t" lIns="0" rIns="0" tIns="0" bIns="0">
+            <a:spAutoFit/>
+          </a:bodyPr>
+          <a:lstStyle/>
+          <a:p>
+            <a:pPr algn="ctr">
+              <a:lnSpc>
+                <a:spcPct val="100000"/>
+              </a:lnSpc>
+              <a:spcBef>
+                <a:spcPts val="0"/>
+              </a:spcBef>
+              <a:spcAft>
+                <a:spcPts val="600"/>
+              </a:spcAft>
+            </a:pPr>
+            <a:r>
+              <a:rPr sz="1800" b="0" i="1">
+                <a:solidFill>
+                  <a:srgbClr val="CCD7C0"/>
+                </a:solidFill>
+                <a:latin typeface="Open Sans"/>
+              </a:rPr>
+              <a:t>alexorozco@ifsul.edu.br</a:t>
+            </a:r>
+          </a:p>
+        </p:txBody>
+      </p:sp>
+      <p:sp>
+        <p:nvSpPr>
+          <p:cNvPr id="8" name="TextBox 7"/>
+          <p:cNvSpPr txBox="1"/>
+          <p:nvPr/>
+        </p:nvSpPr>
+        <p:spPr>
+          <a:xfrm>
+            <a:off x="457200" y="5943600"/>
+            <a:ext cx="11247120" cy="457200"/>
+          </a:xfrm>
+          <a:prstGeom prst="rect">
+            <a:avLst/>
+          </a:prstGeom>
+          <a:noFill/>
+        </p:spPr>
+        <p:txBody>
+          <a:bodyPr wrap="square" anchor="t" lIns="0" rIns="0" tIns="0" bIns="0">
+            <a:spAutoFit/>
+          </a:bodyPr>
+          <a:lstStyle/>
+          <a:p>
+            <a:pPr algn="ctr">
+              <a:lnSpc>
+                <a:spcPct val="100000"/>
+              </a:lnSpc>
+              <a:spcBef>
+                <a:spcPts val="0"/>
+              </a:spcBef>
+              <a:spcAft>
+                <a:spcPts val="600"/>
+              </a:spcAft>
+            </a:pPr>
+            <a:r>
+              <a:rPr sz="1400" b="0" i="0">
+                <a:solidFill>
+                  <a:srgbClr val="CCD7C0"/>
+                </a:solidFill>
+                <a:latin typeface="Open Sans"/>
+              </a:rPr>
+              <a:t>IFSul · Câmpus Sapucaia do Sul</a:t>
+            </a:r>
+          </a:p>
+        </p:txBody>
+      </p:sp>
+    </p:spTree>
+  </p:cSld>
+  <p:clrMapOvr>
+    <a:masterClrMapping/>
+  </p:clrMapOvr>
+</p:sld>
+</file>
+
 <file path=ppt/slides/slide2.xml><?xml version="1.0" encoding="utf-8"?>
 <p:sld xmlns:a="http://schemas.openxmlformats.org/drawingml/2006/main" xmlns:p="http://schemas.openxmlformats.org/presentationml/2006/main" xmlns:r="http://schemas.openxmlformats.org/officeDocument/2006/relationships">
   <p:cSld>
@@ -7711,13 +8092,13 @@
         <p:spPr>
           <a:xfrm>
             <a:off x="0" y="0"/>
-            <a:ext cx="12191695" cy="6858000"/>
+            <a:ext cx="12191695" cy="1234440"/>
           </a:xfrm>
           <a:prstGeom prst="rect">
             <a:avLst/>
           </a:prstGeom>
           <a:solidFill>
-            <a:srgbClr val="1F5232"/>
+            <a:srgbClr val="2D7A3D"/>
           </a:solidFill>
           <a:ln>
             <a:noFill/>
@@ -7754,8 +8135,188 @@
         </p:nvSpPr>
         <p:spPr>
           <a:xfrm>
-            <a:off x="457200" y="2194560"/>
-            <a:ext cx="11247120" cy="548640"/>
+            <a:off x="457200" y="164592"/>
+            <a:ext cx="11247120" cy="640080"/>
+          </a:xfrm>
+          <a:prstGeom prst="rect">
+            <a:avLst/>
+          </a:prstGeom>
+          <a:noFill/>
+        </p:spPr>
+        <p:txBody>
+          <a:bodyPr wrap="square" anchor="t" lIns="0" rIns="0" tIns="0" bIns="0">
+            <a:spAutoFit/>
+          </a:bodyPr>
+          <a:lstStyle/>
+          <a:p>
+            <a:pPr algn="l">
+              <a:lnSpc>
+                <a:spcPct val="100000"/>
+              </a:lnSpc>
+              <a:spcBef>
+                <a:spcPts val="0"/>
+              </a:spcBef>
+              <a:spcAft>
+                <a:spcPts val="600"/>
+              </a:spcAft>
+            </a:pPr>
+            <a:r>
+              <a:rPr sz="3200" b="1" i="0">
+                <a:solidFill>
+                  <a:srgbClr val="FFFFFF"/>
+                </a:solidFill>
+                <a:latin typeface="Open Sans"/>
+              </a:rPr>
+              <a:t>Runbook: vazamento de laudo</a:t>
+            </a:r>
+          </a:p>
+        </p:txBody>
+      </p:sp>
+      <p:sp>
+        <p:nvSpPr>
+          <p:cNvPr id="4" name="TextBox 3"/>
+          <p:cNvSpPr txBox="1"/>
+          <p:nvPr/>
+        </p:nvSpPr>
+        <p:spPr>
+          <a:xfrm>
+            <a:off x="457200" y="777240"/>
+            <a:ext cx="11247120" cy="365760"/>
+          </a:xfrm>
+          <a:prstGeom prst="rect">
+            <a:avLst/>
+          </a:prstGeom>
+          <a:noFill/>
+        </p:spPr>
+        <p:txBody>
+          <a:bodyPr wrap="square" anchor="t" lIns="0" rIns="0" tIns="0" bIns="0">
+            <a:spAutoFit/>
+          </a:bodyPr>
+          <a:lstStyle/>
+          <a:p>
+            <a:pPr algn="l">
+              <a:lnSpc>
+                <a:spcPct val="100000"/>
+              </a:lnSpc>
+              <a:spcBef>
+                <a:spcPts val="0"/>
+              </a:spcBef>
+              <a:spcAft>
+                <a:spcPts val="600"/>
+              </a:spcAft>
+            </a:pPr>
+            <a:r>
+              <a:rPr sz="1600" b="0" i="1">
+                <a:solidFill>
+                  <a:srgbClr val="E0E8DB"/>
+                </a:solidFill>
+                <a:latin typeface="Open Sans"/>
+              </a:rPr>
+              <a:t>Exemplo trabalhado — o modelo que você adapta</a:t>
+            </a:r>
+          </a:p>
+        </p:txBody>
+      </p:sp>
+      <p:sp>
+        <p:nvSpPr>
+          <p:cNvPr id="5" name="Rounded Rectangle 4"/>
+          <p:cNvSpPr/>
+          <p:nvPr/>
+        </p:nvSpPr>
+        <p:spPr>
+          <a:xfrm>
+            <a:off x="411480" y="1508760"/>
+            <a:ext cx="11384280" cy="749808"/>
+          </a:xfrm>
+          <a:prstGeom prst="roundRect">
+            <a:avLst/>
+          </a:prstGeom>
+          <a:solidFill>
+            <a:srgbClr val="E8F0DB"/>
+          </a:solidFill>
+          <a:ln w="12700">
+            <a:solidFill>
+              <a:srgbClr val="7CB342"/>
+            </a:solidFill>
+          </a:ln>
+          <a:effectLst/>
+        </p:spPr>
+        <p:style>
+          <a:lnRef idx="1">
+            <a:schemeClr val="accent1"/>
+          </a:lnRef>
+          <a:fillRef idx="3">
+            <a:schemeClr val="accent1"/>
+          </a:fillRef>
+          <a:effectRef idx="2">
+            <a:schemeClr val="accent1"/>
+          </a:effectRef>
+          <a:fontRef idx="minor">
+            <a:schemeClr val="lt1"/>
+          </a:fontRef>
+        </p:style>
+        <p:txBody>
+          <a:bodyPr rtlCol="0" anchor="ctr"/>
+          <a:lstStyle/>
+          <a:p>
+            <a:pPr algn="ctr"/>
+          </a:p>
+        </p:txBody>
+      </p:sp>
+      <p:sp>
+        <p:nvSpPr>
+          <p:cNvPr id="6" name="Rounded Rectangle 5"/>
+          <p:cNvSpPr/>
+          <p:nvPr/>
+        </p:nvSpPr>
+        <p:spPr>
+          <a:xfrm>
+            <a:off x="502920" y="1600200"/>
+            <a:ext cx="1920240" cy="566927"/>
+          </a:xfrm>
+          <a:prstGeom prst="roundRect">
+            <a:avLst/>
+          </a:prstGeom>
+          <a:solidFill>
+            <a:srgbClr val="2D7A3D"/>
+          </a:solidFill>
+          <a:ln>
+            <a:noFill/>
+          </a:ln>
+          <a:effectLst/>
+        </p:spPr>
+        <p:style>
+          <a:lnRef idx="1">
+            <a:schemeClr val="accent1"/>
+          </a:lnRef>
+          <a:fillRef idx="3">
+            <a:schemeClr val="accent1"/>
+          </a:fillRef>
+          <a:effectRef idx="2">
+            <a:schemeClr val="accent1"/>
+          </a:effectRef>
+          <a:fontRef idx="minor">
+            <a:schemeClr val="lt1"/>
+          </a:fontRef>
+        </p:style>
+        <p:txBody>
+          <a:bodyPr rtlCol="0" anchor="ctr"/>
+          <a:lstStyle/>
+          <a:p>
+            <a:pPr algn="ctr"/>
+          </a:p>
+        </p:txBody>
+      </p:sp>
+      <p:sp>
+        <p:nvSpPr>
+          <p:cNvPr id="7" name="TextBox 6"/>
+          <p:cNvSpPr txBox="1"/>
+          <p:nvPr/>
+        </p:nvSpPr>
+        <p:spPr>
+          <a:xfrm>
+            <a:off x="502920" y="1709928"/>
+            <a:ext cx="1920240" cy="457200"/>
           </a:xfrm>
           <a:prstGeom prst="rect">
             <a:avLst/>
@@ -7780,27 +8341,207 @@
               </a:spcAft>
             </a:pPr>
             <a:r>
-              <a:rPr sz="2000" b="1" i="0">
-                <a:solidFill>
-                  <a:srgbClr val="7CB342"/>
+              <a:rPr sz="1800" b="1" i="0">
+                <a:solidFill>
+                  <a:srgbClr val="FFFFFF"/>
                 </a:solidFill>
                 <a:latin typeface="Open Sans"/>
               </a:rPr>
-              <a:t>PARTE 3</a:t>
-            </a:r>
-          </a:p>
-        </p:txBody>
-      </p:sp>
-      <p:sp>
-        <p:nvSpPr>
-          <p:cNvPr id="4" name="TextBox 3"/>
+              <a:t>1 Detecção</a:t>
+            </a:r>
+          </a:p>
+        </p:txBody>
+      </p:sp>
+      <p:sp>
+        <p:nvSpPr>
+          <p:cNvPr id="8" name="TextBox 7"/>
           <p:cNvSpPr txBox="1"/>
           <p:nvPr/>
         </p:nvSpPr>
         <p:spPr>
           <a:xfrm>
-            <a:off x="457200" y="2834640"/>
-            <a:ext cx="11247120" cy="1280160"/>
+            <a:off x="2697480" y="1709928"/>
+            <a:ext cx="3657600" cy="457200"/>
+          </a:xfrm>
+          <a:prstGeom prst="rect">
+            <a:avLst/>
+          </a:prstGeom>
+          <a:noFill/>
+        </p:spPr>
+        <p:txBody>
+          <a:bodyPr wrap="square" anchor="t" lIns="0" rIns="0" tIns="0" bIns="0">
+            <a:spAutoFit/>
+          </a:bodyPr>
+          <a:lstStyle/>
+          <a:p>
+            <a:pPr algn="l">
+              <a:lnSpc>
+                <a:spcPct val="100000"/>
+              </a:lnSpc>
+              <a:spcBef>
+                <a:spcPts val="0"/>
+              </a:spcBef>
+              <a:spcAft>
+                <a:spcPts val="600"/>
+              </a:spcAft>
+            </a:pPr>
+            <a:r>
+              <a:rPr sz="1500" b="1" i="0">
+                <a:solidFill>
+                  <a:srgbClr val="2D7A3D"/>
+                </a:solidFill>
+                <a:latin typeface="Open Sans"/>
+              </a:rPr>
+              <a:t>auditoria acusa acesso indevido</a:t>
+            </a:r>
+          </a:p>
+        </p:txBody>
+      </p:sp>
+      <p:sp>
+        <p:nvSpPr>
+          <p:cNvPr id="9" name="TextBox 8"/>
+          <p:cNvSpPr txBox="1"/>
+          <p:nvPr/>
+        </p:nvSpPr>
+        <p:spPr>
+          <a:xfrm>
+            <a:off x="6492240" y="1728216"/>
+            <a:ext cx="5120640" cy="457200"/>
+          </a:xfrm>
+          <a:prstGeom prst="rect">
+            <a:avLst/>
+          </a:prstGeom>
+          <a:noFill/>
+        </p:spPr>
+        <p:txBody>
+          <a:bodyPr wrap="square" anchor="t" lIns="0" rIns="0" tIns="0" bIns="0">
+            <a:spAutoFit/>
+          </a:bodyPr>
+          <a:lstStyle/>
+          <a:p>
+            <a:pPr algn="l">
+              <a:lnSpc>
+                <a:spcPct val="100000"/>
+              </a:lnSpc>
+              <a:spcBef>
+                <a:spcPts val="0"/>
+              </a:spcBef>
+              <a:spcAft>
+                <a:spcPts val="600"/>
+              </a:spcAft>
+            </a:pPr>
+            <a:r>
+              <a:rPr sz="1300" b="0" i="0">
+                <a:solidFill>
+                  <a:srgbClr val="212121"/>
+                </a:solidFill>
+                <a:latin typeface="Open Sans"/>
+              </a:rPr>
+              <a:t>quem, quando, qual exame — preserve o log (hash-chain)</a:t>
+            </a:r>
+          </a:p>
+        </p:txBody>
+      </p:sp>
+      <p:sp>
+        <p:nvSpPr>
+          <p:cNvPr id="10" name="Rounded Rectangle 9"/>
+          <p:cNvSpPr/>
+          <p:nvPr/>
+        </p:nvSpPr>
+        <p:spPr>
+          <a:xfrm>
+            <a:off x="411480" y="2313432"/>
+            <a:ext cx="11384280" cy="749808"/>
+          </a:xfrm>
+          <a:prstGeom prst="roundRect">
+            <a:avLst/>
+          </a:prstGeom>
+          <a:solidFill>
+            <a:srgbClr val="E8F0DB"/>
+          </a:solidFill>
+          <a:ln w="12700">
+            <a:solidFill>
+              <a:srgbClr val="7CB342"/>
+            </a:solidFill>
+          </a:ln>
+          <a:effectLst/>
+        </p:spPr>
+        <p:style>
+          <a:lnRef idx="1">
+            <a:schemeClr val="accent1"/>
+          </a:lnRef>
+          <a:fillRef idx="3">
+            <a:schemeClr val="accent1"/>
+          </a:fillRef>
+          <a:effectRef idx="2">
+            <a:schemeClr val="accent1"/>
+          </a:effectRef>
+          <a:fontRef idx="minor">
+            <a:schemeClr val="lt1"/>
+          </a:fontRef>
+        </p:style>
+        <p:txBody>
+          <a:bodyPr rtlCol="0" anchor="ctr"/>
+          <a:lstStyle/>
+          <a:p>
+            <a:pPr algn="ctr"/>
+          </a:p>
+        </p:txBody>
+      </p:sp>
+      <p:sp>
+        <p:nvSpPr>
+          <p:cNvPr id="11" name="Rounded Rectangle 10"/>
+          <p:cNvSpPr/>
+          <p:nvPr/>
+        </p:nvSpPr>
+        <p:spPr>
+          <a:xfrm>
+            <a:off x="502920" y="2404872"/>
+            <a:ext cx="1920240" cy="566927"/>
+          </a:xfrm>
+          <a:prstGeom prst="roundRect">
+            <a:avLst/>
+          </a:prstGeom>
+          <a:solidFill>
+            <a:srgbClr val="2D7A3D"/>
+          </a:solidFill>
+          <a:ln>
+            <a:noFill/>
+          </a:ln>
+          <a:effectLst/>
+        </p:spPr>
+        <p:style>
+          <a:lnRef idx="1">
+            <a:schemeClr val="accent1"/>
+          </a:lnRef>
+          <a:fillRef idx="3">
+            <a:schemeClr val="accent1"/>
+          </a:fillRef>
+          <a:effectRef idx="2">
+            <a:schemeClr val="accent1"/>
+          </a:effectRef>
+          <a:fontRef idx="minor">
+            <a:schemeClr val="lt1"/>
+          </a:fontRef>
+        </p:style>
+        <p:txBody>
+          <a:bodyPr rtlCol="0" anchor="ctr"/>
+          <a:lstStyle/>
+          <a:p>
+            <a:pPr algn="ctr"/>
+          </a:p>
+        </p:txBody>
+      </p:sp>
+      <p:sp>
+        <p:nvSpPr>
+          <p:cNvPr id="12" name="TextBox 11"/>
+          <p:cNvSpPr txBox="1"/>
+          <p:nvPr/>
+        </p:nvSpPr>
+        <p:spPr>
+          <a:xfrm>
+            <a:off x="502920" y="2514600"/>
+            <a:ext cx="1920240" cy="457200"/>
           </a:xfrm>
           <a:prstGeom prst="rect">
             <a:avLst/>
@@ -7825,27 +8566,207 @@
               </a:spcAft>
             </a:pPr>
             <a:r>
-              <a:rPr sz="6000" b="1" i="0">
+              <a:rPr sz="1800" b="1" i="0">
                 <a:solidFill>
                   <a:srgbClr val="FFFFFF"/>
                 </a:solidFill>
                 <a:latin typeface="Open Sans"/>
               </a:rPr>
-              <a:t>No VidaPlus</a:t>
-            </a:r>
-          </a:p>
-        </p:txBody>
-      </p:sp>
-      <p:sp>
-        <p:nvSpPr>
-          <p:cNvPr id="5" name="TextBox 4"/>
+              <a:t>2 Contenção</a:t>
+            </a:r>
+          </a:p>
+        </p:txBody>
+      </p:sp>
+      <p:sp>
+        <p:nvSpPr>
+          <p:cNvPr id="13" name="TextBox 12"/>
           <p:cNvSpPr txBox="1"/>
           <p:nvPr/>
         </p:nvSpPr>
         <p:spPr>
           <a:xfrm>
-            <a:off x="457200" y="4297680"/>
-            <a:ext cx="11247120" cy="457200"/>
+            <a:off x="2697480" y="2514600"/>
+            <a:ext cx="3657600" cy="457200"/>
+          </a:xfrm>
+          <a:prstGeom prst="rect">
+            <a:avLst/>
+          </a:prstGeom>
+          <a:noFill/>
+        </p:spPr>
+        <p:txBody>
+          <a:bodyPr wrap="square" anchor="t" lIns="0" rIns="0" tIns="0" bIns="0">
+            <a:spAutoFit/>
+          </a:bodyPr>
+          <a:lstStyle/>
+          <a:p>
+            <a:pPr algn="l">
+              <a:lnSpc>
+                <a:spcPct val="100000"/>
+              </a:lnSpc>
+              <a:spcBef>
+                <a:spcPts val="0"/>
+              </a:spcBef>
+              <a:spcAft>
+                <a:spcPts val="600"/>
+              </a:spcAft>
+            </a:pPr>
+            <a:r>
+              <a:rPr sz="1500" b="1" i="0">
+                <a:solidFill>
+                  <a:srgbClr val="2D7A3D"/>
+                </a:solidFill>
+                <a:latin typeface="Open Sans"/>
+              </a:rPr>
+              <a:t>revogar sessão; bloquear endpoint</a:t>
+            </a:r>
+          </a:p>
+        </p:txBody>
+      </p:sp>
+      <p:sp>
+        <p:nvSpPr>
+          <p:cNvPr id="14" name="TextBox 13"/>
+          <p:cNvSpPr txBox="1"/>
+          <p:nvPr/>
+        </p:nvSpPr>
+        <p:spPr>
+          <a:xfrm>
+            <a:off x="6492240" y="2532887"/>
+            <a:ext cx="5120640" cy="457200"/>
+          </a:xfrm>
+          <a:prstGeom prst="rect">
+            <a:avLst/>
+          </a:prstGeom>
+          <a:noFill/>
+        </p:spPr>
+        <p:txBody>
+          <a:bodyPr wrap="square" anchor="t" lIns="0" rIns="0" tIns="0" bIns="0">
+            <a:spAutoFit/>
+          </a:bodyPr>
+          <a:lstStyle/>
+          <a:p>
+            <a:pPr algn="l">
+              <a:lnSpc>
+                <a:spcPct val="100000"/>
+              </a:lnSpc>
+              <a:spcBef>
+                <a:spcPts val="0"/>
+              </a:spcBef>
+              <a:spcAft>
+                <a:spcPts val="600"/>
+              </a:spcAft>
+            </a:pPr>
+            <a:r>
+              <a:rPr sz="1300" b="0" i="0">
+                <a:solidFill>
+                  <a:srgbClr val="212121"/>
+                </a:solidFill>
+                <a:latin typeface="Open Sans"/>
+              </a:rPr>
+              <a:t>estancar sem destruir evidência (em minutos)</a:t>
+            </a:r>
+          </a:p>
+        </p:txBody>
+      </p:sp>
+      <p:sp>
+        <p:nvSpPr>
+          <p:cNvPr id="15" name="Rounded Rectangle 14"/>
+          <p:cNvSpPr/>
+          <p:nvPr/>
+        </p:nvSpPr>
+        <p:spPr>
+          <a:xfrm>
+            <a:off x="411480" y="3118103"/>
+            <a:ext cx="11384280" cy="749808"/>
+          </a:xfrm>
+          <a:prstGeom prst="roundRect">
+            <a:avLst/>
+          </a:prstGeom>
+          <a:solidFill>
+            <a:srgbClr val="E8F0DB"/>
+          </a:solidFill>
+          <a:ln w="12700">
+            <a:solidFill>
+              <a:srgbClr val="7CB342"/>
+            </a:solidFill>
+          </a:ln>
+          <a:effectLst/>
+        </p:spPr>
+        <p:style>
+          <a:lnRef idx="1">
+            <a:schemeClr val="accent1"/>
+          </a:lnRef>
+          <a:fillRef idx="3">
+            <a:schemeClr val="accent1"/>
+          </a:fillRef>
+          <a:effectRef idx="2">
+            <a:schemeClr val="accent1"/>
+          </a:effectRef>
+          <a:fontRef idx="minor">
+            <a:schemeClr val="lt1"/>
+          </a:fontRef>
+        </p:style>
+        <p:txBody>
+          <a:bodyPr rtlCol="0" anchor="ctr"/>
+          <a:lstStyle/>
+          <a:p>
+            <a:pPr algn="ctr"/>
+          </a:p>
+        </p:txBody>
+      </p:sp>
+      <p:sp>
+        <p:nvSpPr>
+          <p:cNvPr id="16" name="Rounded Rectangle 15"/>
+          <p:cNvSpPr/>
+          <p:nvPr/>
+        </p:nvSpPr>
+        <p:spPr>
+          <a:xfrm>
+            <a:off x="502920" y="3209544"/>
+            <a:ext cx="1920240" cy="566927"/>
+          </a:xfrm>
+          <a:prstGeom prst="roundRect">
+            <a:avLst/>
+          </a:prstGeom>
+          <a:solidFill>
+            <a:srgbClr val="2D7A3D"/>
+          </a:solidFill>
+          <a:ln>
+            <a:noFill/>
+          </a:ln>
+          <a:effectLst/>
+        </p:spPr>
+        <p:style>
+          <a:lnRef idx="1">
+            <a:schemeClr val="accent1"/>
+          </a:lnRef>
+          <a:fillRef idx="3">
+            <a:schemeClr val="accent1"/>
+          </a:fillRef>
+          <a:effectRef idx="2">
+            <a:schemeClr val="accent1"/>
+          </a:effectRef>
+          <a:fontRef idx="minor">
+            <a:schemeClr val="lt1"/>
+          </a:fontRef>
+        </p:style>
+        <p:txBody>
+          <a:bodyPr rtlCol="0" anchor="ctr"/>
+          <a:lstStyle/>
+          <a:p>
+            <a:pPr algn="ctr"/>
+          </a:p>
+        </p:txBody>
+      </p:sp>
+      <p:sp>
+        <p:nvSpPr>
+          <p:cNvPr id="17" name="TextBox 16"/>
+          <p:cNvSpPr txBox="1"/>
+          <p:nvPr/>
+        </p:nvSpPr>
+        <p:spPr>
+          <a:xfrm>
+            <a:off x="502920" y="3319272"/>
+            <a:ext cx="1920240" cy="457200"/>
           </a:xfrm>
           <a:prstGeom prst="rect">
             <a:avLst/>
@@ -7870,33 +8791,169 @@
               </a:spcAft>
             </a:pPr>
             <a:r>
-              <a:rPr sz="2200" b="0" i="1">
-                <a:solidFill>
-                  <a:srgbClr val="CCD7C0"/>
+              <a:rPr sz="1800" b="1" i="0">
+                <a:solidFill>
+                  <a:srgbClr val="FFFFFF"/>
                 </a:solidFill>
                 <a:latin typeface="Open Sans"/>
               </a:rPr>
-              <a:t>A etapa desta semana (Fase 7)</a:t>
-            </a:r>
-          </a:p>
-        </p:txBody>
-      </p:sp>
-      <p:sp>
-        <p:nvSpPr>
-          <p:cNvPr id="6" name="Rectangle 5"/>
+              <a:t>3 Erradicação</a:t>
+            </a:r>
+          </a:p>
+        </p:txBody>
+      </p:sp>
+      <p:sp>
+        <p:nvSpPr>
+          <p:cNvPr id="18" name="TextBox 17"/>
+          <p:cNvSpPr txBox="1"/>
+          <p:nvPr/>
+        </p:nvSpPr>
+        <p:spPr>
+          <a:xfrm>
+            <a:off x="2697480" y="3319272"/>
+            <a:ext cx="3657600" cy="457200"/>
+          </a:xfrm>
+          <a:prstGeom prst="rect">
+            <a:avLst/>
+          </a:prstGeom>
+          <a:noFill/>
+        </p:spPr>
+        <p:txBody>
+          <a:bodyPr wrap="square" anchor="t" lIns="0" rIns="0" tIns="0" bIns="0">
+            <a:spAutoFit/>
+          </a:bodyPr>
+          <a:lstStyle/>
+          <a:p>
+            <a:pPr algn="l">
+              <a:lnSpc>
+                <a:spcPct val="100000"/>
+              </a:lnSpc>
+              <a:spcBef>
+                <a:spcPts val="0"/>
+              </a:spcBef>
+              <a:spcAft>
+                <a:spcPts val="600"/>
+              </a:spcAft>
+            </a:pPr>
+            <a:r>
+              <a:rPr sz="1500" b="1" i="0">
+                <a:solidFill>
+                  <a:srgbClr val="2D7A3D"/>
+                </a:solidFill>
+                <a:latin typeface="Open Sans"/>
+              </a:rPr>
+              <a:t>corrigir a causa-raiz (IDOR)</a:t>
+            </a:r>
+          </a:p>
+        </p:txBody>
+      </p:sp>
+      <p:sp>
+        <p:nvSpPr>
+          <p:cNvPr id="19" name="TextBox 18"/>
+          <p:cNvSpPr txBox="1"/>
+          <p:nvPr/>
+        </p:nvSpPr>
+        <p:spPr>
+          <a:xfrm>
+            <a:off x="6492240" y="3337559"/>
+            <a:ext cx="5120640" cy="457200"/>
+          </a:xfrm>
+          <a:prstGeom prst="rect">
+            <a:avLst/>
+          </a:prstGeom>
+          <a:noFill/>
+        </p:spPr>
+        <p:txBody>
+          <a:bodyPr wrap="square" anchor="t" lIns="0" rIns="0" tIns="0" bIns="0">
+            <a:spAutoFit/>
+          </a:bodyPr>
+          <a:lstStyle/>
+          <a:p>
+            <a:pPr algn="l">
+              <a:lnSpc>
+                <a:spcPct val="100000"/>
+              </a:lnSpc>
+              <a:spcBef>
+                <a:spcPts val="0"/>
+              </a:spcBef>
+              <a:spcAft>
+                <a:spcPts val="600"/>
+              </a:spcAft>
+            </a:pPr>
+            <a:r>
+              <a:rPr sz="1300" b="0" i="0">
+                <a:solidFill>
+                  <a:srgbClr val="212121"/>
+                </a:solidFill>
+                <a:latin typeface="Open Sans"/>
+              </a:rPr>
+              <a:t>ownership no servidor; deny-by-default; URL assinada</a:t>
+            </a:r>
+          </a:p>
+        </p:txBody>
+      </p:sp>
+      <p:sp>
+        <p:nvSpPr>
+          <p:cNvPr id="20" name="Rounded Rectangle 19"/>
           <p:cNvSpPr/>
           <p:nvPr/>
         </p:nvSpPr>
         <p:spPr>
           <a:xfrm>
-            <a:off x="5184648" y="4983480"/>
-            <a:ext cx="1828800" cy="25400"/>
-          </a:xfrm>
-          <a:prstGeom prst="rect">
+            <a:off x="411480" y="3922775"/>
+            <a:ext cx="11384280" cy="749808"/>
+          </a:xfrm>
+          <a:prstGeom prst="roundRect">
             <a:avLst/>
           </a:prstGeom>
           <a:solidFill>
-            <a:srgbClr val="7CB342"/>
+            <a:srgbClr val="E8F0DB"/>
+          </a:solidFill>
+          <a:ln w="12700">
+            <a:solidFill>
+              <a:srgbClr val="7CB342"/>
+            </a:solidFill>
+          </a:ln>
+          <a:effectLst/>
+        </p:spPr>
+        <p:style>
+          <a:lnRef idx="1">
+            <a:schemeClr val="accent1"/>
+          </a:lnRef>
+          <a:fillRef idx="3">
+            <a:schemeClr val="accent1"/>
+          </a:fillRef>
+          <a:effectRef idx="2">
+            <a:schemeClr val="accent1"/>
+          </a:effectRef>
+          <a:fontRef idx="minor">
+            <a:schemeClr val="lt1"/>
+          </a:fontRef>
+        </p:style>
+        <p:txBody>
+          <a:bodyPr rtlCol="0" anchor="ctr"/>
+          <a:lstStyle/>
+          <a:p>
+            <a:pPr algn="ctr"/>
+          </a:p>
+        </p:txBody>
+      </p:sp>
+      <p:sp>
+        <p:nvSpPr>
+          <p:cNvPr id="21" name="Rounded Rectangle 20"/>
+          <p:cNvSpPr/>
+          <p:nvPr/>
+        </p:nvSpPr>
+        <p:spPr>
+          <a:xfrm>
+            <a:off x="502920" y="4014215"/>
+            <a:ext cx="1920240" cy="566927"/>
+          </a:xfrm>
+          <a:prstGeom prst="roundRect">
+            <a:avLst/>
+          </a:prstGeom>
+          <a:solidFill>
+            <a:srgbClr val="2D7A3D"/>
           </a:solidFill>
           <a:ln>
             <a:noFill/>
@@ -7922,6 +8979,636 @@
           <a:lstStyle/>
           <a:p>
             <a:pPr algn="ctr"/>
+          </a:p>
+        </p:txBody>
+      </p:sp>
+      <p:sp>
+        <p:nvSpPr>
+          <p:cNvPr id="22" name="TextBox 21"/>
+          <p:cNvSpPr txBox="1"/>
+          <p:nvPr/>
+        </p:nvSpPr>
+        <p:spPr>
+          <a:xfrm>
+            <a:off x="502920" y="4123943"/>
+            <a:ext cx="1920240" cy="457200"/>
+          </a:xfrm>
+          <a:prstGeom prst="rect">
+            <a:avLst/>
+          </a:prstGeom>
+          <a:noFill/>
+        </p:spPr>
+        <p:txBody>
+          <a:bodyPr wrap="square" anchor="t" lIns="0" rIns="0" tIns="0" bIns="0">
+            <a:spAutoFit/>
+          </a:bodyPr>
+          <a:lstStyle/>
+          <a:p>
+            <a:pPr algn="ctr">
+              <a:lnSpc>
+                <a:spcPct val="100000"/>
+              </a:lnSpc>
+              <a:spcBef>
+                <a:spcPts val="0"/>
+              </a:spcBef>
+              <a:spcAft>
+                <a:spcPts val="600"/>
+              </a:spcAft>
+            </a:pPr>
+            <a:r>
+              <a:rPr sz="1800" b="1" i="0">
+                <a:solidFill>
+                  <a:srgbClr val="FFFFFF"/>
+                </a:solidFill>
+                <a:latin typeface="Open Sans"/>
+              </a:rPr>
+              <a:t>4 Recuperação</a:t>
+            </a:r>
+          </a:p>
+        </p:txBody>
+      </p:sp>
+      <p:sp>
+        <p:nvSpPr>
+          <p:cNvPr id="23" name="TextBox 22"/>
+          <p:cNvSpPr txBox="1"/>
+          <p:nvPr/>
+        </p:nvSpPr>
+        <p:spPr>
+          <a:xfrm>
+            <a:off x="2697480" y="4123943"/>
+            <a:ext cx="3657600" cy="457200"/>
+          </a:xfrm>
+          <a:prstGeom prst="rect">
+            <a:avLst/>
+          </a:prstGeom>
+          <a:noFill/>
+        </p:spPr>
+        <p:txBody>
+          <a:bodyPr wrap="square" anchor="t" lIns="0" rIns="0" tIns="0" bIns="0">
+            <a:spAutoFit/>
+          </a:bodyPr>
+          <a:lstStyle/>
+          <a:p>
+            <a:pPr algn="l">
+              <a:lnSpc>
+                <a:spcPct val="100000"/>
+              </a:lnSpc>
+              <a:spcBef>
+                <a:spcPts val="0"/>
+              </a:spcBef>
+              <a:spcAft>
+                <a:spcPts val="600"/>
+              </a:spcAft>
+            </a:pPr>
+            <a:r>
+              <a:rPr sz="1500" b="1" i="0">
+                <a:solidFill>
+                  <a:srgbClr val="2D7A3D"/>
+                </a:solidFill>
+                <a:latin typeface="Open Sans"/>
+              </a:rPr>
+              <a:t>redeploy + teste anti-IDOR</a:t>
+            </a:r>
+          </a:p>
+        </p:txBody>
+      </p:sp>
+      <p:sp>
+        <p:nvSpPr>
+          <p:cNvPr id="24" name="TextBox 23"/>
+          <p:cNvSpPr txBox="1"/>
+          <p:nvPr/>
+        </p:nvSpPr>
+        <p:spPr>
+          <a:xfrm>
+            <a:off x="6492240" y="4142231"/>
+            <a:ext cx="5120640" cy="457200"/>
+          </a:xfrm>
+          <a:prstGeom prst="rect">
+            <a:avLst/>
+          </a:prstGeom>
+          <a:noFill/>
+        </p:spPr>
+        <p:txBody>
+          <a:bodyPr wrap="square" anchor="t" lIns="0" rIns="0" tIns="0" bIns="0">
+            <a:spAutoFit/>
+          </a:bodyPr>
+          <a:lstStyle/>
+          <a:p>
+            <a:pPr algn="l">
+              <a:lnSpc>
+                <a:spcPct val="100000"/>
+              </a:lnSpc>
+              <a:spcBef>
+                <a:spcPts val="0"/>
+              </a:spcBef>
+              <a:spcAft>
+                <a:spcPts val="600"/>
+              </a:spcAft>
+            </a:pPr>
+            <a:r>
+              <a:rPr sz="1300" b="0" i="0">
+                <a:solidFill>
+                  <a:srgbClr val="212121"/>
+                </a:solidFill>
+                <a:latin typeface="Open Sans"/>
+              </a:rPr>
+              <a:t>A pede exame de B -&gt; 403; voltar a monitorar</a:t>
+            </a:r>
+          </a:p>
+        </p:txBody>
+      </p:sp>
+      <p:sp>
+        <p:nvSpPr>
+          <p:cNvPr id="25" name="Rounded Rectangle 24"/>
+          <p:cNvSpPr/>
+          <p:nvPr/>
+        </p:nvSpPr>
+        <p:spPr>
+          <a:xfrm>
+            <a:off x="411480" y="4727448"/>
+            <a:ext cx="11384280" cy="749808"/>
+          </a:xfrm>
+          <a:prstGeom prst="roundRect">
+            <a:avLst/>
+          </a:prstGeom>
+          <a:solidFill>
+            <a:srgbClr val="E8F0DB"/>
+          </a:solidFill>
+          <a:ln w="12700">
+            <a:solidFill>
+              <a:srgbClr val="7CB342"/>
+            </a:solidFill>
+          </a:ln>
+          <a:effectLst/>
+        </p:spPr>
+        <p:style>
+          <a:lnRef idx="1">
+            <a:schemeClr val="accent1"/>
+          </a:lnRef>
+          <a:fillRef idx="3">
+            <a:schemeClr val="accent1"/>
+          </a:fillRef>
+          <a:effectRef idx="2">
+            <a:schemeClr val="accent1"/>
+          </a:effectRef>
+          <a:fontRef idx="minor">
+            <a:schemeClr val="lt1"/>
+          </a:fontRef>
+        </p:style>
+        <p:txBody>
+          <a:bodyPr rtlCol="0" anchor="ctr"/>
+          <a:lstStyle/>
+          <a:p>
+            <a:pPr algn="ctr"/>
+          </a:p>
+        </p:txBody>
+      </p:sp>
+      <p:sp>
+        <p:nvSpPr>
+          <p:cNvPr id="26" name="Rounded Rectangle 25"/>
+          <p:cNvSpPr/>
+          <p:nvPr/>
+        </p:nvSpPr>
+        <p:spPr>
+          <a:xfrm>
+            <a:off x="502920" y="4818888"/>
+            <a:ext cx="1920240" cy="566927"/>
+          </a:xfrm>
+          <a:prstGeom prst="roundRect">
+            <a:avLst/>
+          </a:prstGeom>
+          <a:solidFill>
+            <a:srgbClr val="2D7A3D"/>
+          </a:solidFill>
+          <a:ln>
+            <a:noFill/>
+          </a:ln>
+          <a:effectLst/>
+        </p:spPr>
+        <p:style>
+          <a:lnRef idx="1">
+            <a:schemeClr val="accent1"/>
+          </a:lnRef>
+          <a:fillRef idx="3">
+            <a:schemeClr val="accent1"/>
+          </a:fillRef>
+          <a:effectRef idx="2">
+            <a:schemeClr val="accent1"/>
+          </a:effectRef>
+          <a:fontRef idx="minor">
+            <a:schemeClr val="lt1"/>
+          </a:fontRef>
+        </p:style>
+        <p:txBody>
+          <a:bodyPr rtlCol="0" anchor="ctr"/>
+          <a:lstStyle/>
+          <a:p>
+            <a:pPr algn="ctr"/>
+          </a:p>
+        </p:txBody>
+      </p:sp>
+      <p:sp>
+        <p:nvSpPr>
+          <p:cNvPr id="27" name="TextBox 26"/>
+          <p:cNvSpPr txBox="1"/>
+          <p:nvPr/>
+        </p:nvSpPr>
+        <p:spPr>
+          <a:xfrm>
+            <a:off x="502920" y="4928616"/>
+            <a:ext cx="1920240" cy="457200"/>
+          </a:xfrm>
+          <a:prstGeom prst="rect">
+            <a:avLst/>
+          </a:prstGeom>
+          <a:noFill/>
+        </p:spPr>
+        <p:txBody>
+          <a:bodyPr wrap="square" anchor="t" lIns="0" rIns="0" tIns="0" bIns="0">
+            <a:spAutoFit/>
+          </a:bodyPr>
+          <a:lstStyle/>
+          <a:p>
+            <a:pPr algn="ctr">
+              <a:lnSpc>
+                <a:spcPct val="100000"/>
+              </a:lnSpc>
+              <a:spcBef>
+                <a:spcPts val="0"/>
+              </a:spcBef>
+              <a:spcAft>
+                <a:spcPts val="600"/>
+              </a:spcAft>
+            </a:pPr>
+            <a:r>
+              <a:rPr sz="1800" b="1" i="0">
+                <a:solidFill>
+                  <a:srgbClr val="FFFFFF"/>
+                </a:solidFill>
+                <a:latin typeface="Open Sans"/>
+              </a:rPr>
+              <a:t>5 Notificação</a:t>
+            </a:r>
+          </a:p>
+        </p:txBody>
+      </p:sp>
+      <p:sp>
+        <p:nvSpPr>
+          <p:cNvPr id="28" name="TextBox 27"/>
+          <p:cNvSpPr txBox="1"/>
+          <p:nvPr/>
+        </p:nvSpPr>
+        <p:spPr>
+          <a:xfrm>
+            <a:off x="2697480" y="4928616"/>
+            <a:ext cx="3657600" cy="457200"/>
+          </a:xfrm>
+          <a:prstGeom prst="rect">
+            <a:avLst/>
+          </a:prstGeom>
+          <a:noFill/>
+        </p:spPr>
+        <p:txBody>
+          <a:bodyPr wrap="square" anchor="t" lIns="0" rIns="0" tIns="0" bIns="0">
+            <a:spAutoFit/>
+          </a:bodyPr>
+          <a:lstStyle/>
+          <a:p>
+            <a:pPr algn="l">
+              <a:lnSpc>
+                <a:spcPct val="100000"/>
+              </a:lnSpc>
+              <a:spcBef>
+                <a:spcPts val="0"/>
+              </a:spcBef>
+              <a:spcAft>
+                <a:spcPts val="600"/>
+              </a:spcAft>
+            </a:pPr>
+            <a:r>
+              <a:rPr sz="1500" b="1" i="0">
+                <a:solidFill>
+                  <a:srgbClr val="2D7A3D"/>
+                </a:solidFill>
+                <a:latin typeface="Open Sans"/>
+              </a:rPr>
+              <a:t>ANPD + titular até 3 dias úteis</a:t>
+            </a:r>
+          </a:p>
+        </p:txBody>
+      </p:sp>
+      <p:sp>
+        <p:nvSpPr>
+          <p:cNvPr id="29" name="TextBox 28"/>
+          <p:cNvSpPr txBox="1"/>
+          <p:nvPr/>
+        </p:nvSpPr>
+        <p:spPr>
+          <a:xfrm>
+            <a:off x="6492240" y="4946904"/>
+            <a:ext cx="5120640" cy="457200"/>
+          </a:xfrm>
+          <a:prstGeom prst="rect">
+            <a:avLst/>
+          </a:prstGeom>
+          <a:noFill/>
+        </p:spPr>
+        <p:txBody>
+          <a:bodyPr wrap="square" anchor="t" lIns="0" rIns="0" tIns="0" bIns="0">
+            <a:spAutoFit/>
+          </a:bodyPr>
+          <a:lstStyle/>
+          <a:p>
+            <a:pPr algn="l">
+              <a:lnSpc>
+                <a:spcPct val="100000"/>
+              </a:lnSpc>
+              <a:spcBef>
+                <a:spcPts val="0"/>
+              </a:spcBef>
+              <a:spcAft>
+                <a:spcPts val="600"/>
+              </a:spcAft>
+            </a:pPr>
+            <a:r>
+              <a:rPr sz="1300" b="0" i="0">
+                <a:solidFill>
+                  <a:srgbClr val="212121"/>
+                </a:solidFill>
+                <a:latin typeface="Open Sans"/>
+              </a:rPr>
+              <a:t>dados, nº de titulares, medidas, riscos, mitigação (art. 48)</a:t>
+            </a:r>
+          </a:p>
+        </p:txBody>
+      </p:sp>
+      <p:sp>
+        <p:nvSpPr>
+          <p:cNvPr id="30" name="Rounded Rectangle 29"/>
+          <p:cNvSpPr/>
+          <p:nvPr/>
+        </p:nvSpPr>
+        <p:spPr>
+          <a:xfrm>
+            <a:off x="411480" y="5532119"/>
+            <a:ext cx="11384280" cy="749808"/>
+          </a:xfrm>
+          <a:prstGeom prst="roundRect">
+            <a:avLst/>
+          </a:prstGeom>
+          <a:solidFill>
+            <a:srgbClr val="E8F0DB"/>
+          </a:solidFill>
+          <a:ln w="12700">
+            <a:solidFill>
+              <a:srgbClr val="7CB342"/>
+            </a:solidFill>
+          </a:ln>
+          <a:effectLst/>
+        </p:spPr>
+        <p:style>
+          <a:lnRef idx="1">
+            <a:schemeClr val="accent1"/>
+          </a:lnRef>
+          <a:fillRef idx="3">
+            <a:schemeClr val="accent1"/>
+          </a:fillRef>
+          <a:effectRef idx="2">
+            <a:schemeClr val="accent1"/>
+          </a:effectRef>
+          <a:fontRef idx="minor">
+            <a:schemeClr val="lt1"/>
+          </a:fontRef>
+        </p:style>
+        <p:txBody>
+          <a:bodyPr rtlCol="0" anchor="ctr"/>
+          <a:lstStyle/>
+          <a:p>
+            <a:pPr algn="ctr"/>
+          </a:p>
+        </p:txBody>
+      </p:sp>
+      <p:sp>
+        <p:nvSpPr>
+          <p:cNvPr id="31" name="Rounded Rectangle 30"/>
+          <p:cNvSpPr/>
+          <p:nvPr/>
+        </p:nvSpPr>
+        <p:spPr>
+          <a:xfrm>
+            <a:off x="502920" y="5623559"/>
+            <a:ext cx="1920240" cy="566927"/>
+          </a:xfrm>
+          <a:prstGeom prst="roundRect">
+            <a:avLst/>
+          </a:prstGeom>
+          <a:solidFill>
+            <a:srgbClr val="2D7A3D"/>
+          </a:solidFill>
+          <a:ln>
+            <a:noFill/>
+          </a:ln>
+          <a:effectLst/>
+        </p:spPr>
+        <p:style>
+          <a:lnRef idx="1">
+            <a:schemeClr val="accent1"/>
+          </a:lnRef>
+          <a:fillRef idx="3">
+            <a:schemeClr val="accent1"/>
+          </a:fillRef>
+          <a:effectRef idx="2">
+            <a:schemeClr val="accent1"/>
+          </a:effectRef>
+          <a:fontRef idx="minor">
+            <a:schemeClr val="lt1"/>
+          </a:fontRef>
+        </p:style>
+        <p:txBody>
+          <a:bodyPr rtlCol="0" anchor="ctr"/>
+          <a:lstStyle/>
+          <a:p>
+            <a:pPr algn="ctr"/>
+          </a:p>
+        </p:txBody>
+      </p:sp>
+      <p:sp>
+        <p:nvSpPr>
+          <p:cNvPr id="32" name="TextBox 31"/>
+          <p:cNvSpPr txBox="1"/>
+          <p:nvPr/>
+        </p:nvSpPr>
+        <p:spPr>
+          <a:xfrm>
+            <a:off x="502920" y="5733287"/>
+            <a:ext cx="1920240" cy="457200"/>
+          </a:xfrm>
+          <a:prstGeom prst="rect">
+            <a:avLst/>
+          </a:prstGeom>
+          <a:noFill/>
+        </p:spPr>
+        <p:txBody>
+          <a:bodyPr wrap="square" anchor="t" lIns="0" rIns="0" tIns="0" bIns="0">
+            <a:spAutoFit/>
+          </a:bodyPr>
+          <a:lstStyle/>
+          <a:p>
+            <a:pPr algn="ctr">
+              <a:lnSpc>
+                <a:spcPct val="100000"/>
+              </a:lnSpc>
+              <a:spcBef>
+                <a:spcPts val="0"/>
+              </a:spcBef>
+              <a:spcAft>
+                <a:spcPts val="600"/>
+              </a:spcAft>
+            </a:pPr>
+            <a:r>
+              <a:rPr sz="1800" b="1" i="0">
+                <a:solidFill>
+                  <a:srgbClr val="FFFFFF"/>
+                </a:solidFill>
+                <a:latin typeface="Open Sans"/>
+              </a:rPr>
+              <a:t>6 Lições</a:t>
+            </a:r>
+          </a:p>
+        </p:txBody>
+      </p:sp>
+      <p:sp>
+        <p:nvSpPr>
+          <p:cNvPr id="33" name="TextBox 32"/>
+          <p:cNvSpPr txBox="1"/>
+          <p:nvPr/>
+        </p:nvSpPr>
+        <p:spPr>
+          <a:xfrm>
+            <a:off x="2697480" y="5733287"/>
+            <a:ext cx="3657600" cy="457200"/>
+          </a:xfrm>
+          <a:prstGeom prst="rect">
+            <a:avLst/>
+          </a:prstGeom>
+          <a:noFill/>
+        </p:spPr>
+        <p:txBody>
+          <a:bodyPr wrap="square" anchor="t" lIns="0" rIns="0" tIns="0" bIns="0">
+            <a:spAutoFit/>
+          </a:bodyPr>
+          <a:lstStyle/>
+          <a:p>
+            <a:pPr algn="l">
+              <a:lnSpc>
+                <a:spcPct val="100000"/>
+              </a:lnSpc>
+              <a:spcBef>
+                <a:spcPts val="0"/>
+              </a:spcBef>
+              <a:spcAft>
+                <a:spcPts val="600"/>
+              </a:spcAft>
+            </a:pPr>
+            <a:r>
+              <a:rPr sz="1500" b="1" i="0">
+                <a:solidFill>
+                  <a:srgbClr val="2D7A3D"/>
+                </a:solidFill>
+                <a:latin typeface="Open Sans"/>
+              </a:rPr>
+              <a:t>post-mortem sem culpados</a:t>
+            </a:r>
+          </a:p>
+        </p:txBody>
+      </p:sp>
+      <p:sp>
+        <p:nvSpPr>
+          <p:cNvPr id="34" name="TextBox 33"/>
+          <p:cNvSpPr txBox="1"/>
+          <p:nvPr/>
+        </p:nvSpPr>
+        <p:spPr>
+          <a:xfrm>
+            <a:off x="6492240" y="5751575"/>
+            <a:ext cx="5120640" cy="457200"/>
+          </a:xfrm>
+          <a:prstGeom prst="rect">
+            <a:avLst/>
+          </a:prstGeom>
+          <a:noFill/>
+        </p:spPr>
+        <p:txBody>
+          <a:bodyPr wrap="square" anchor="t" lIns="0" rIns="0" tIns="0" bIns="0">
+            <a:spAutoFit/>
+          </a:bodyPr>
+          <a:lstStyle/>
+          <a:p>
+            <a:pPr algn="l">
+              <a:lnSpc>
+                <a:spcPct val="100000"/>
+              </a:lnSpc>
+              <a:spcBef>
+                <a:spcPts val="0"/>
+              </a:spcBef>
+              <a:spcAft>
+                <a:spcPts val="600"/>
+              </a:spcAft>
+            </a:pPr>
+            <a:r>
+              <a:rPr sz="1300" b="0" i="0">
+                <a:solidFill>
+                  <a:srgbClr val="212121"/>
+                </a:solidFill>
+                <a:latin typeface="Open Sans"/>
+              </a:rPr>
+              <a:t>vira novo requisito + entra na matriz</a:t>
+            </a:r>
+          </a:p>
+        </p:txBody>
+      </p:sp>
+      <p:sp>
+        <p:nvSpPr>
+          <p:cNvPr id="35" name="TextBox 34"/>
+          <p:cNvSpPr txBox="1"/>
+          <p:nvPr/>
+        </p:nvSpPr>
+        <p:spPr>
+          <a:xfrm>
+            <a:off x="10972800" y="6446520"/>
+            <a:ext cx="914400" cy="320040"/>
+          </a:xfrm>
+          <a:prstGeom prst="rect">
+            <a:avLst/>
+          </a:prstGeom>
+          <a:noFill/>
+        </p:spPr>
+        <p:txBody>
+          <a:bodyPr wrap="square" anchor="t" lIns="0" rIns="0" tIns="0" bIns="0">
+            <a:spAutoFit/>
+          </a:bodyPr>
+          <a:lstStyle/>
+          <a:p>
+            <a:pPr algn="r">
+              <a:lnSpc>
+                <a:spcPct val="100000"/>
+              </a:lnSpc>
+              <a:spcBef>
+                <a:spcPts val="0"/>
+              </a:spcBef>
+              <a:spcAft>
+                <a:spcPts val="600"/>
+              </a:spcAft>
+            </a:pPr>
+            <a:r>
+              <a:rPr sz="1100" b="0" i="0">
+                <a:solidFill>
+                  <a:srgbClr val="616161"/>
+                </a:solidFill>
+                <a:latin typeface="Open Sans"/>
+              </a:rPr>
+              <a:t>7</a:t>
+            </a:r>
           </a:p>
         </p:txBody>
       </p:sp>
@@ -7952,13 +9639,13 @@
         <p:spPr>
           <a:xfrm>
             <a:off x="0" y="0"/>
-            <a:ext cx="12191695" cy="1234440"/>
+            <a:ext cx="12191695" cy="6858000"/>
           </a:xfrm>
           <a:prstGeom prst="rect">
             <a:avLst/>
           </a:prstGeom>
           <a:solidFill>
-            <a:srgbClr val="2D7A3D"/>
+            <a:srgbClr val="1F5232"/>
           </a:solidFill>
           <a:ln>
             <a:noFill/>
@@ -7995,8 +9682,8 @@
         </p:nvSpPr>
         <p:spPr>
           <a:xfrm>
-            <a:off x="457200" y="164592"/>
-            <a:ext cx="11247120" cy="640080"/>
+            <a:off x="457200" y="2194560"/>
+            <a:ext cx="11247120" cy="548640"/>
           </a:xfrm>
           <a:prstGeom prst="rect">
             <a:avLst/>
@@ -8009,7 +9696,7 @@
           </a:bodyPr>
           <a:lstStyle/>
           <a:p>
-            <a:pPr algn="l">
+            <a:pPr algn="ctr">
               <a:lnSpc>
                 <a:spcPct val="100000"/>
               </a:lnSpc>
@@ -8021,13 +9708,13 @@
               </a:spcAft>
             </a:pPr>
             <a:r>
-              <a:rPr sz="3200" b="1" i="0">
-                <a:solidFill>
-                  <a:srgbClr val="FFFFFF"/>
+              <a:rPr sz="2000" b="1" i="0">
+                <a:solidFill>
+                  <a:srgbClr val="7CB342"/>
                 </a:solidFill>
                 <a:latin typeface="Open Sans"/>
               </a:rPr>
-              <a:t>Entregável da Fase 7</a:t>
+              <a:t>PARTE 3</a:t>
             </a:r>
           </a:p>
         </p:txBody>
@@ -8040,8 +9727,8 @@
         </p:nvSpPr>
         <p:spPr>
           <a:xfrm>
-            <a:off x="457200" y="777240"/>
-            <a:ext cx="11247120" cy="365760"/>
+            <a:off x="457200" y="2834640"/>
+            <a:ext cx="11247120" cy="1280160"/>
           </a:xfrm>
           <a:prstGeom prst="rect">
             <a:avLst/>
@@ -8054,7 +9741,7 @@
           </a:bodyPr>
           <a:lstStyle/>
           <a:p>
-            <a:pPr algn="l">
+            <a:pPr algn="ctr">
               <a:lnSpc>
                 <a:spcPct val="100000"/>
               </a:lnSpc>
@@ -8066,244 +9753,27 @@
               </a:spcAft>
             </a:pPr>
             <a:r>
-              <a:rPr sz="1600" b="0" i="1">
-                <a:solidFill>
-                  <a:srgbClr val="E0E8DB"/>
+              <a:rPr sz="6000" b="1" i="0">
+                <a:solidFill>
+                  <a:srgbClr val="FFFFFF"/>
                 </a:solidFill>
                 <a:latin typeface="Open Sans"/>
               </a:rPr>
-              <a:t>Auditoria + plano de resposta</a:t>
-            </a:r>
-          </a:p>
-        </p:txBody>
-      </p:sp>
-      <p:sp>
-        <p:nvSpPr>
-          <p:cNvPr id="5" name="Rounded Rectangle 4"/>
-          <p:cNvSpPr/>
-          <p:nvPr/>
-        </p:nvSpPr>
-        <p:spPr>
-          <a:xfrm>
-            <a:off x="411480" y="1463040"/>
-            <a:ext cx="11384280" cy="5029200"/>
-          </a:xfrm>
-          <a:prstGeom prst="roundRect">
-            <a:avLst/>
-          </a:prstGeom>
-          <a:solidFill>
-            <a:srgbClr val="F5F5F5"/>
-          </a:solidFill>
-          <a:ln w="15875">
-            <a:solidFill>
-              <a:srgbClr val="7CB342"/>
-            </a:solidFill>
-          </a:ln>
-          <a:effectLst/>
-        </p:spPr>
-        <p:style>
-          <a:lnRef idx="1">
-            <a:schemeClr val="accent1"/>
-          </a:lnRef>
-          <a:fillRef idx="3">
-            <a:schemeClr val="accent1"/>
-          </a:fillRef>
-          <a:effectRef idx="2">
-            <a:schemeClr val="accent1"/>
-          </a:effectRef>
-          <a:fontRef idx="minor">
-            <a:schemeClr val="lt1"/>
-          </a:fontRef>
-        </p:style>
-        <p:txBody>
-          <a:bodyPr rtlCol="0" anchor="ctr"/>
-          <a:lstStyle/>
-          <a:p>
-            <a:pPr algn="ctr"/>
-          </a:p>
-        </p:txBody>
-      </p:sp>
-      <p:sp>
-        <p:nvSpPr>
-          <p:cNvPr id="6" name="TextBox 5"/>
+              <a:t>No VidaPlus</a:t>
+            </a:r>
+          </a:p>
+        </p:txBody>
+      </p:sp>
+      <p:sp>
+        <p:nvSpPr>
+          <p:cNvPr id="5" name="TextBox 4"/>
           <p:cNvSpPr txBox="1"/>
           <p:nvPr/>
         </p:nvSpPr>
         <p:spPr>
           <a:xfrm>
-            <a:off x="868680" y="1783080"/>
-            <a:ext cx="10515600" cy="4572000"/>
-          </a:xfrm>
-          <a:prstGeom prst="rect">
-            <a:avLst/>
-          </a:prstGeom>
-          <a:noFill/>
-        </p:spPr>
-        <p:txBody>
-          <a:bodyPr wrap="square">
-            <a:spAutoFit/>
-          </a:bodyPr>
-          <a:lstStyle/>
-          <a:p>
-            <a:pPr algn="l">
-              <a:lnSpc>
-                <a:spcPct val="110000"/>
-              </a:lnSpc>
-              <a:spcAft>
-                <a:spcPts val="1400"/>
-              </a:spcAft>
-            </a:pPr>
-            <a:r>
-              <a:rPr sz="2000" b="1">
-                <a:solidFill>
-                  <a:srgbClr val="7CB342"/>
-                </a:solidFill>
-                <a:latin typeface="Open Sans"/>
-              </a:rPr>
-              <a:t>▸ </a:t>
-            </a:r>
-            <a:r>
-              <a:rPr sz="1800" b="1">
-                <a:solidFill>
-                  <a:srgbClr val="2D7A3D"/>
-                </a:solidFill>
-                <a:latin typeface="Open Sans"/>
-              </a:rPr>
-              <a:t>Trilha: </a:t>
-            </a:r>
-            <a:r>
-              <a:rPr sz="1800">
-                <a:solidFill>
-                  <a:srgbClr val="212121"/>
-                </a:solidFill>
-                <a:latin typeface="Open Sans"/>
-              </a:rPr>
-              <a:t>valide append-only, hash-chain, sem PII em texto claro.</a:t>
-            </a:r>
-          </a:p>
-          <a:p>
-            <a:pPr algn="l">
-              <a:lnSpc>
-                <a:spcPct val="110000"/>
-              </a:lnSpc>
-              <a:spcAft>
-                <a:spcPts val="1400"/>
-              </a:spcAft>
-            </a:pPr>
-            <a:r>
-              <a:rPr sz="2000" b="1">
-                <a:solidFill>
-                  <a:srgbClr val="7CB342"/>
-                </a:solidFill>
-                <a:latin typeface="Open Sans"/>
-              </a:rPr>
-              <a:t>▸ </a:t>
-            </a:r>
-            <a:r>
-              <a:rPr sz="1800" b="1">
-                <a:solidFill>
-                  <a:srgbClr val="2D7A3D"/>
-                </a:solidFill>
-                <a:latin typeface="Open Sans"/>
-              </a:rPr>
-              <a:t>Runbook: </a:t>
-            </a:r>
-            <a:r>
-              <a:rPr sz="1800">
-                <a:solidFill>
-                  <a:srgbClr val="212121"/>
-                </a:solidFill>
-                <a:latin typeface="Open Sans"/>
-              </a:rPr>
-              <a:t>escreva a resposta a um vazamento de laudo, passo a passo.</a:t>
-            </a:r>
-          </a:p>
-          <a:p>
-            <a:pPr algn="l">
-              <a:lnSpc>
-                <a:spcPct val="110000"/>
-              </a:lnSpc>
-              <a:spcAft>
-                <a:spcPts val="1400"/>
-              </a:spcAft>
-            </a:pPr>
-            <a:r>
-              <a:rPr sz="2000" b="1">
-                <a:solidFill>
-                  <a:srgbClr val="7CB342"/>
-                </a:solidFill>
-                <a:latin typeface="Open Sans"/>
-              </a:rPr>
-              <a:t>▸ </a:t>
-            </a:r>
-            <a:r>
-              <a:rPr sz="1800" b="1">
-                <a:solidFill>
-                  <a:srgbClr val="2D7A3D"/>
-                </a:solidFill>
-                <a:latin typeface="Open Sans"/>
-              </a:rPr>
-              <a:t>ANPD: </a:t>
-            </a:r>
-            <a:r>
-              <a:rPr sz="1800">
-                <a:solidFill>
-                  <a:srgbClr val="212121"/>
-                </a:solidFill>
-                <a:latin typeface="Open Sans"/>
-              </a:rPr>
-              <a:t>defina quando e como comunicar (art. 48).</a:t>
-            </a:r>
-          </a:p>
-          <a:p>
-            <a:pPr algn="l">
-              <a:lnSpc>
-                <a:spcPct val="110000"/>
-              </a:lnSpc>
-              <a:spcAft>
-                <a:spcPts val="1400"/>
-              </a:spcAft>
-            </a:pPr>
-            <a:r>
-              <a:rPr sz="2000" b="1">
-                <a:solidFill>
-                  <a:srgbClr val="7CB342"/>
-                </a:solidFill>
-                <a:latin typeface="Open Sans"/>
-              </a:rPr>
-              <a:t>▸ </a:t>
-            </a:r>
-            <a:r>
-              <a:rPr sz="1800" b="1">
-                <a:solidFill>
-                  <a:srgbClr val="2D7A3D"/>
-                </a:solidFill>
-                <a:latin typeface="Open Sans"/>
-              </a:rPr>
-              <a:t>Integridade: </a:t>
-            </a:r>
-            <a:r>
-              <a:rPr sz="1800">
-                <a:solidFill>
-                  <a:srgbClr val="212121"/>
-                </a:solidFill>
-                <a:latin typeface="Open Sans"/>
-              </a:rPr>
-              <a:t>adulterar uma entrada do log deve ser detectável.</a:t>
-            </a:r>
-          </a:p>
-        </p:txBody>
-      </p:sp>
-      <p:sp>
-        <p:nvSpPr>
-          <p:cNvPr id="7" name="TextBox 6"/>
-          <p:cNvSpPr txBox="1"/>
-          <p:nvPr/>
-        </p:nvSpPr>
-        <p:spPr>
-          <a:xfrm>
-            <a:off x="10972800" y="6446520"/>
-            <a:ext cx="914400" cy="320040"/>
+            <a:off x="457200" y="4297680"/>
+            <a:ext cx="11247120" cy="457200"/>
           </a:xfrm>
           <a:prstGeom prst="rect">
             <a:avLst/>
@@ -8316,7 +9786,7 @@
           </a:bodyPr>
           <a:lstStyle/>
           <a:p>
-            <a:pPr algn="r">
+            <a:pPr algn="ctr">
               <a:lnSpc>
                 <a:spcPct val="100000"/>
               </a:lnSpc>
@@ -8328,14 +9798,58 @@
               </a:spcAft>
             </a:pPr>
             <a:r>
-              <a:rPr sz="1100" b="0" i="0">
-                <a:solidFill>
-                  <a:srgbClr val="616161"/>
+              <a:rPr sz="2200" b="0" i="1">
+                <a:solidFill>
+                  <a:srgbClr val="CCD7C0"/>
                 </a:solidFill>
                 <a:latin typeface="Open Sans"/>
               </a:rPr>
-              <a:t>8</a:t>
-            </a:r>
+              <a:t>A etapa desta semana (Fase 7)</a:t>
+            </a:r>
+          </a:p>
+        </p:txBody>
+      </p:sp>
+      <p:sp>
+        <p:nvSpPr>
+          <p:cNvPr id="6" name="Rectangle 5"/>
+          <p:cNvSpPr/>
+          <p:nvPr/>
+        </p:nvSpPr>
+        <p:spPr>
+          <a:xfrm>
+            <a:off x="5184648" y="4983480"/>
+            <a:ext cx="1828800" cy="25400"/>
+          </a:xfrm>
+          <a:prstGeom prst="rect">
+            <a:avLst/>
+          </a:prstGeom>
+          <a:solidFill>
+            <a:srgbClr val="7CB342"/>
+          </a:solidFill>
+          <a:ln>
+            <a:noFill/>
+          </a:ln>
+          <a:effectLst/>
+        </p:spPr>
+        <p:style>
+          <a:lnRef idx="1">
+            <a:schemeClr val="accent1"/>
+          </a:lnRef>
+          <a:fillRef idx="3">
+            <a:schemeClr val="accent1"/>
+          </a:fillRef>
+          <a:effectRef idx="2">
+            <a:schemeClr val="accent1"/>
+          </a:effectRef>
+          <a:fontRef idx="minor">
+            <a:schemeClr val="lt1"/>
+          </a:fontRef>
+        </p:style>
+        <p:txBody>
+          <a:bodyPr rtlCol="0" anchor="ctr"/>
+          <a:lstStyle/>
+          <a:p>
+            <a:pPr algn="ctr"/>
           </a:p>
         </p:txBody>
       </p:sp>
@@ -8366,13 +9880,13 @@
         <p:spPr>
           <a:xfrm>
             <a:off x="0" y="0"/>
-            <a:ext cx="12191695" cy="6858000"/>
+            <a:ext cx="12191695" cy="1234440"/>
           </a:xfrm>
           <a:prstGeom prst="rect">
             <a:avLst/>
           </a:prstGeom>
           <a:solidFill>
-            <a:srgbClr val="1F5232"/>
+            <a:srgbClr val="2D7A3D"/>
           </a:solidFill>
           <a:ln>
             <a:noFill/>
@@ -8401,40 +9915,16 @@
           </a:p>
         </p:txBody>
       </p:sp>
-      <p:pic>
-        <p:nvPicPr>
-          <p:cNvPr id="3" name="Picture 2" descr="logo_branco.png"/>
-          <p:cNvPicPr>
-            <a:picLocks noChangeAspect="1"/>
-          </p:cNvPicPr>
-          <p:nvPr/>
-        </p:nvPicPr>
-        <p:blipFill>
-          <a:blip r:embed="rId2"/>
-          <a:stretch>
-            <a:fillRect/>
-          </a:stretch>
-        </p:blipFill>
-        <p:spPr>
-          <a:xfrm>
-            <a:off x="4142232" y="548640"/>
-            <a:ext cx="3909060" cy="868680"/>
-          </a:xfrm>
-          <a:prstGeom prst="rect">
-            <a:avLst/>
-          </a:prstGeom>
-        </p:spPr>
-      </p:pic>
-      <p:sp>
-        <p:nvSpPr>
-          <p:cNvPr id="4" name="TextBox 3"/>
+      <p:sp>
+        <p:nvSpPr>
+          <p:cNvPr id="3" name="TextBox 2"/>
           <p:cNvSpPr txBox="1"/>
           <p:nvPr/>
         </p:nvSpPr>
         <p:spPr>
           <a:xfrm>
-            <a:off x="457200" y="2194560"/>
-            <a:ext cx="11247120" cy="1371600"/>
+            <a:off x="457200" y="164592"/>
+            <a:ext cx="11247120" cy="640080"/>
           </a:xfrm>
           <a:prstGeom prst="rect">
             <a:avLst/>
@@ -8447,7 +9937,7 @@
           </a:bodyPr>
           <a:lstStyle/>
           <a:p>
-            <a:pPr algn="ctr">
+            <a:pPr algn="l">
               <a:lnSpc>
                 <a:spcPct val="100000"/>
               </a:lnSpc>
@@ -8459,71 +9949,27 @@
               </a:spcAft>
             </a:pPr>
             <a:r>
-              <a:rPr sz="8800" b="1" i="0">
-                <a:solidFill>
-                  <a:srgbClr val="7CB342"/>
+              <a:rPr sz="3200" b="1" i="0">
+                <a:solidFill>
+                  <a:srgbClr val="FFFFFF"/>
                 </a:solidFill>
                 <a:latin typeface="Open Sans"/>
               </a:rPr>
-              <a:t>Perguntas?</a:t>
-            </a:r>
-          </a:p>
-        </p:txBody>
-      </p:sp>
-      <p:sp>
-        <p:nvSpPr>
-          <p:cNvPr id="5" name="Rectangle 4"/>
-          <p:cNvSpPr/>
-          <p:nvPr/>
-        </p:nvSpPr>
-        <p:spPr>
-          <a:xfrm>
-            <a:off x="5184648" y="3977639"/>
-            <a:ext cx="1828800" cy="25400"/>
-          </a:xfrm>
-          <a:prstGeom prst="rect">
-            <a:avLst/>
-          </a:prstGeom>
-          <a:solidFill>
-            <a:srgbClr val="7CB342"/>
-          </a:solidFill>
-          <a:ln>
-            <a:noFill/>
-          </a:ln>
-          <a:effectLst/>
-        </p:spPr>
-        <p:style>
-          <a:lnRef idx="1">
-            <a:schemeClr val="accent1"/>
-          </a:lnRef>
-          <a:fillRef idx="3">
-            <a:schemeClr val="accent1"/>
-          </a:fillRef>
-          <a:effectRef idx="2">
-            <a:schemeClr val="accent1"/>
-          </a:effectRef>
-          <a:fontRef idx="minor">
-            <a:schemeClr val="lt1"/>
-          </a:fontRef>
-        </p:style>
-        <p:txBody>
-          <a:bodyPr rtlCol="0" anchor="ctr"/>
-          <a:lstStyle/>
-          <a:p>
-            <a:pPr algn="ctr"/>
-          </a:p>
-        </p:txBody>
-      </p:sp>
-      <p:sp>
-        <p:nvSpPr>
-          <p:cNvPr id="6" name="TextBox 5"/>
+              <a:t>Entregável da Fase 7</a:t>
+            </a:r>
+          </a:p>
+        </p:txBody>
+      </p:sp>
+      <p:sp>
+        <p:nvSpPr>
+          <p:cNvPr id="4" name="TextBox 3"/>
           <p:cNvSpPr txBox="1"/>
           <p:nvPr/>
         </p:nvSpPr>
         <p:spPr>
           <a:xfrm>
-            <a:off x="457200" y="4297680"/>
-            <a:ext cx="11247120" cy="457200"/>
+            <a:off x="457200" y="777240"/>
+            <a:ext cx="11247120" cy="365760"/>
           </a:xfrm>
           <a:prstGeom prst="rect">
             <a:avLst/>
@@ -8536,7 +9982,7 @@
           </a:bodyPr>
           <a:lstStyle/>
           <a:p>
-            <a:pPr algn="ctr">
+            <a:pPr algn="l">
               <a:lnSpc>
                 <a:spcPct val="100000"/>
               </a:lnSpc>
@@ -8548,13 +9994,267 @@
               </a:spcAft>
             </a:pPr>
             <a:r>
-              <a:rPr sz="2200" b="1" i="0">
-                <a:solidFill>
-                  <a:srgbClr val="FFFFFF"/>
+              <a:rPr sz="1600" b="0" i="1">
+                <a:solidFill>
+                  <a:srgbClr val="E0E8DB"/>
                 </a:solidFill>
                 <a:latin typeface="Open Sans"/>
               </a:rPr>
-              <a:t>Prof. Dr. Alex Mulattieri Suarez Orozco</a:t>
+              <a:t>Trilha de auditoria + runbook (dossiê §9)</a:t>
+            </a:r>
+          </a:p>
+        </p:txBody>
+      </p:sp>
+      <p:sp>
+        <p:nvSpPr>
+          <p:cNvPr id="5" name="Rounded Rectangle 4"/>
+          <p:cNvSpPr/>
+          <p:nvPr/>
+        </p:nvSpPr>
+        <p:spPr>
+          <a:xfrm>
+            <a:off x="411480" y="1463040"/>
+            <a:ext cx="11384280" cy="5029200"/>
+          </a:xfrm>
+          <a:prstGeom prst="roundRect">
+            <a:avLst/>
+          </a:prstGeom>
+          <a:solidFill>
+            <a:srgbClr val="F5F5F5"/>
+          </a:solidFill>
+          <a:ln w="15875">
+            <a:solidFill>
+              <a:srgbClr val="7CB342"/>
+            </a:solidFill>
+          </a:ln>
+          <a:effectLst/>
+        </p:spPr>
+        <p:style>
+          <a:lnRef idx="1">
+            <a:schemeClr val="accent1"/>
+          </a:lnRef>
+          <a:fillRef idx="3">
+            <a:schemeClr val="accent1"/>
+          </a:fillRef>
+          <a:effectRef idx="2">
+            <a:schemeClr val="accent1"/>
+          </a:effectRef>
+          <a:fontRef idx="minor">
+            <a:schemeClr val="lt1"/>
+          </a:fontRef>
+        </p:style>
+        <p:txBody>
+          <a:bodyPr rtlCol="0" anchor="ctr"/>
+          <a:lstStyle/>
+          <a:p>
+            <a:pPr algn="ctr"/>
+          </a:p>
+        </p:txBody>
+      </p:sp>
+      <p:sp>
+        <p:nvSpPr>
+          <p:cNvPr id="6" name="TextBox 5"/>
+          <p:cNvSpPr txBox="1"/>
+          <p:nvPr/>
+        </p:nvSpPr>
+        <p:spPr>
+          <a:xfrm>
+            <a:off x="868680" y="1783080"/>
+            <a:ext cx="10515600" cy="4572000"/>
+          </a:xfrm>
+          <a:prstGeom prst="rect">
+            <a:avLst/>
+          </a:prstGeom>
+          <a:noFill/>
+        </p:spPr>
+        <p:txBody>
+          <a:bodyPr wrap="square">
+            <a:spAutoFit/>
+          </a:bodyPr>
+          <a:lstStyle/>
+          <a:p>
+            <a:pPr algn="l">
+              <a:lnSpc>
+                <a:spcPct val="110000"/>
+              </a:lnSpc>
+              <a:spcAft>
+                <a:spcPts val="1400"/>
+              </a:spcAft>
+            </a:pPr>
+            <a:r>
+              <a:rPr sz="2000" b="1">
+                <a:solidFill>
+                  <a:srgbClr val="7CB342"/>
+                </a:solidFill>
+                <a:latin typeface="Open Sans"/>
+              </a:rPr>
+              <a:t>▸ </a:t>
+            </a:r>
+            <a:r>
+              <a:rPr sz="1800" b="1">
+                <a:solidFill>
+                  <a:srgbClr val="2D7A3D"/>
+                </a:solidFill>
+                <a:latin typeface="Open Sans"/>
+              </a:rPr>
+              <a:t>Entregar: </a:t>
+            </a:r>
+            <a:r>
+              <a:rPr sz="1800">
+                <a:solidFill>
+                  <a:srgbClr val="212121"/>
+                </a:solidFill>
+                <a:latin typeface="Open Sans"/>
+              </a:rPr>
+              <a:t>trilha de auditoria funcionando: append-only, hash-chain, sem PII.</a:t>
+            </a:r>
+          </a:p>
+          <a:p>
+            <a:pPr algn="l">
+              <a:lnSpc>
+                <a:spcPct val="110000"/>
+              </a:lnSpc>
+              <a:spcAft>
+                <a:spcPts val="1400"/>
+              </a:spcAft>
+            </a:pPr>
+            <a:r>
+              <a:rPr sz="2000" b="1">
+                <a:solidFill>
+                  <a:srgbClr val="7CB342"/>
+                </a:solidFill>
+                <a:latin typeface="Open Sans"/>
+              </a:rPr>
+              <a:t>▸ </a:t>
+            </a:r>
+            <a:r>
+              <a:rPr sz="1800" b="1">
+                <a:solidFill>
+                  <a:srgbClr val="2D7A3D"/>
+                </a:solidFill>
+                <a:latin typeface="Open Sans"/>
+              </a:rPr>
+              <a:t>Runbook: </a:t>
+            </a:r>
+            <a:r>
+              <a:rPr sz="1800">
+                <a:solidFill>
+                  <a:srgbClr val="212121"/>
+                </a:solidFill>
+                <a:latin typeface="Open Sans"/>
+              </a:rPr>
+              <a:t>os 6 passos da resposta ao vazamento de laudo, preenchidos (§9.1).</a:t>
+            </a:r>
+          </a:p>
+          <a:p>
+            <a:pPr algn="l">
+              <a:lnSpc>
+                <a:spcPct val="110000"/>
+              </a:lnSpc>
+              <a:spcAft>
+                <a:spcPts val="1400"/>
+              </a:spcAft>
+            </a:pPr>
+            <a:r>
+              <a:rPr sz="2000" b="1">
+                <a:solidFill>
+                  <a:srgbClr val="7CB342"/>
+                </a:solidFill>
+                <a:latin typeface="Open Sans"/>
+              </a:rPr>
+              <a:t>▸ </a:t>
+            </a:r>
+            <a:r>
+              <a:rPr sz="1800" b="1">
+                <a:solidFill>
+                  <a:srgbClr val="2D7A3D"/>
+                </a:solidFill>
+                <a:latin typeface="Open Sans"/>
+              </a:rPr>
+              <a:t>Notificação: </a:t>
+            </a:r>
+            <a:r>
+              <a:rPr sz="1800">
+                <a:solidFill>
+                  <a:srgbClr val="212121"/>
+                </a:solidFill>
+                <a:latin typeface="Open Sans"/>
+              </a:rPr>
+              <a:t>quando/prazo/conteúdo da comunicação à ANPD e ao titular (art. 48, §9.2).</a:t>
+            </a:r>
+          </a:p>
+          <a:p>
+            <a:pPr algn="l">
+              <a:lnSpc>
+                <a:spcPct val="110000"/>
+              </a:lnSpc>
+              <a:spcAft>
+                <a:spcPts val="1400"/>
+              </a:spcAft>
+            </a:pPr>
+            <a:r>
+              <a:rPr sz="2000" b="1">
+                <a:solidFill>
+                  <a:srgbClr val="7CB342"/>
+                </a:solidFill>
+                <a:latin typeface="Open Sans"/>
+              </a:rPr>
+              <a:t>▸ </a:t>
+            </a:r>
+            <a:r>
+              <a:rPr sz="1800" b="1">
+                <a:solidFill>
+                  <a:srgbClr val="2D7A3D"/>
+                </a:solidFill>
+                <a:latin typeface="Open Sans"/>
+              </a:rPr>
+              <a:t>Integridade: </a:t>
+            </a:r>
+            <a:r>
+              <a:rPr sz="1800">
+                <a:solidFill>
+                  <a:srgbClr val="212121"/>
+                </a:solidFill>
+                <a:latin typeface="Open Sans"/>
+              </a:rPr>
+              <a:t>mostre que adulterar uma entrada do log é detectável.</a:t>
+            </a:r>
+          </a:p>
+          <a:p>
+            <a:pPr algn="l">
+              <a:lnSpc>
+                <a:spcPct val="110000"/>
+              </a:lnSpc>
+              <a:spcAft>
+                <a:spcPts val="1400"/>
+              </a:spcAft>
+            </a:pPr>
+            <a:r>
+              <a:rPr sz="2000" b="1">
+                <a:solidFill>
+                  <a:srgbClr val="7CB342"/>
+                </a:solidFill>
+                <a:latin typeface="Open Sans"/>
+              </a:rPr>
+              <a:t>▸ </a:t>
+            </a:r>
+            <a:r>
+              <a:rPr sz="1800" b="1">
+                <a:solidFill>
+                  <a:srgbClr val="2D7A3D"/>
+                </a:solidFill>
+                <a:latin typeface="Open Sans"/>
+              </a:rPr>
+              <a:t>Pronto quando: </a:t>
+            </a:r>
+            <a:r>
+              <a:rPr sz="1800">
+                <a:solidFill>
+                  <a:srgbClr val="212121"/>
+                </a:solidFill>
+                <a:latin typeface="Open Sans"/>
+              </a:rPr>
+              <a:t>trilha íntegra + runbook completo + regra do art. 48 definida.</a:t>
             </a:r>
           </a:p>
         </p:txBody>
@@ -8567,8 +10267,8 @@
         </p:nvSpPr>
         <p:spPr>
           <a:xfrm>
-            <a:off x="457200" y="4800600"/>
-            <a:ext cx="11247120" cy="457200"/>
+            <a:off x="10972800" y="6446520"/>
+            <a:ext cx="914400" cy="320040"/>
           </a:xfrm>
           <a:prstGeom prst="rect">
             <a:avLst/>
@@ -8581,7 +10281,7 @@
           </a:bodyPr>
           <a:lstStyle/>
           <a:p>
-            <a:pPr algn="ctr">
+            <a:pPr algn="r">
               <a:lnSpc>
                 <a:spcPct val="100000"/>
               </a:lnSpc>
@@ -8593,58 +10293,13 @@
               </a:spcAft>
             </a:pPr>
             <a:r>
-              <a:rPr sz="1800" b="0" i="1">
-                <a:solidFill>
-                  <a:srgbClr val="CCD7C0"/>
+              <a:rPr sz="1100" b="0" i="0">
+                <a:solidFill>
+                  <a:srgbClr val="616161"/>
                 </a:solidFill>
                 <a:latin typeface="Open Sans"/>
               </a:rPr>
-              <a:t>alexorozco@ifsul.edu.br</a:t>
-            </a:r>
-          </a:p>
-        </p:txBody>
-      </p:sp>
-      <p:sp>
-        <p:nvSpPr>
-          <p:cNvPr id="8" name="TextBox 7"/>
-          <p:cNvSpPr txBox="1"/>
-          <p:nvPr/>
-        </p:nvSpPr>
-        <p:spPr>
-          <a:xfrm>
-            <a:off x="457200" y="5943600"/>
-            <a:ext cx="11247120" cy="457200"/>
-          </a:xfrm>
-          <a:prstGeom prst="rect">
-            <a:avLst/>
-          </a:prstGeom>
-          <a:noFill/>
-        </p:spPr>
-        <p:txBody>
-          <a:bodyPr wrap="square" anchor="t" lIns="0" rIns="0" tIns="0" bIns="0">
-            <a:spAutoFit/>
-          </a:bodyPr>
-          <a:lstStyle/>
-          <a:p>
-            <a:pPr algn="ctr">
-              <a:lnSpc>
-                <a:spcPct val="100000"/>
-              </a:lnSpc>
-              <a:spcBef>
-                <a:spcPts val="0"/>
-              </a:spcBef>
-              <a:spcAft>
-                <a:spcPts val="600"/>
-              </a:spcAft>
-            </a:pPr>
-            <a:r>
-              <a:rPr sz="1400" b="0" i="0">
-                <a:solidFill>
-                  <a:srgbClr val="CCD7C0"/>
-                </a:solidFill>
-                <a:latin typeface="Open Sans"/>
-              </a:rPr>
-              <a:t>IFSul · Câmpus Sapucaia do Sul</a:t>
+              <a:t>9</a:t>
             </a:r>
           </a:p>
         </p:txBody>

--- a/aulas/aula-09-operacao-incidentes.pptx
+++ b/aulas/aula-09-operacao-incidentes.pptx
@@ -4154,7 +4154,7 @@
                 </a:solidFill>
                 <a:latin typeface="Open Sans"/>
               </a:rPr>
-              <a:t>TADS · Segurança em Sistemas Computacionais</a:t>
+              <a:t>TADS · Segurança de Sistemas Computacionais</a:t>
             </a:r>
           </a:p>
         </p:txBody>

--- a/aulas/aula-09-operacao-incidentes.pptx
+++ b/aulas/aula-09-operacao-incidentes.pptx
@@ -10000,7 +10000,7 @@
                 </a:solidFill>
                 <a:latin typeface="Open Sans"/>
               </a:rPr>
-              <a:t>Trilha de auditoria + runbook (dossiê §9)</a:t>
+              <a:t>Operação do pacote + runbook (dossiê §9)</a:t>
             </a:r>
           </a:p>
         </p:txBody>
@@ -10106,7 +10106,7 @@
                 </a:solidFill>
                 <a:latin typeface="Open Sans"/>
               </a:rPr>
-              <a:t>trilha de auditoria funcionando: append-only, hash-chain, sem PII.</a:t>
+              <a:t>o que monitorar e registrar nas funcionalidades do pacote (sem PII).</a:t>
             </a:r>
           </a:p>
           <a:p>
@@ -10143,7 +10143,7 @@
                 </a:solidFill>
                 <a:latin typeface="Open Sans"/>
               </a:rPr>
-              <a:t>os 6 passos da resposta ao vazamento de laudo, preenchidos (§9.1).</a:t>
+              <a:t>os 6 passos de um incidente do seu pacote, preenchidos (§9.1).</a:t>
             </a:r>
           </a:p>
           <a:p>
@@ -10217,7 +10217,7 @@
                 </a:solidFill>
                 <a:latin typeface="Open Sans"/>
               </a:rPr>
-              <a:t>mostre que adulterar uma entrada do log é detectável.</a:t>
+              <a:t>quem tem o F-05 mostra que adulterar o log é detectável.</a:t>
             </a:r>
           </a:p>
           <a:p>
@@ -10254,7 +10254,7 @@
                 </a:solidFill>
                 <a:latin typeface="Open Sans"/>
               </a:rPr>
-              <a:t>trilha íntegra + runbook completo + regra do art. 48 definida.</a:t>
+              <a:t>operação descrita + runbook completo + regra do art. 48 definida.</a:t>
             </a:r>
           </a:p>
         </p:txBody>
